--- a/presentacion/Presentacion_MCP.pptx
+++ b/presentacion/Presentacion_MCP.pptx
@@ -26,7 +26,6 @@
     <p:sldId id="274" r:id="rId25"/>
     <p:sldId id="275" r:id="rId26"/>
     <p:sldId id="276" r:id="rId27"/>
-    <p:sldId id="277" r:id="rId28"/>
   </p:sldIdLst>
   <p:sldSz cx="12191695" cy="6858000" type="screen4x3"/>
   <p:notesSz cx="6858000" cy="9144000"/>
@@ -3926,7 +3925,7 @@
               </a:defRPr>
             </a:pPr>
             <a:r>
-              <a:t>11 / 22</a:t>
+              <a:t>11 / 21</a:t>
             </a:r>
           </a:p>
         </p:txBody>
@@ -4612,7 +4611,7 @@
               </a:defRPr>
             </a:pPr>
             <a:r>
-              <a:t>12 / 22</a:t>
+              <a:t>12 / 21</a:t>
             </a:r>
           </a:p>
         </p:txBody>
@@ -4641,12 +4640,12 @@
           <a:p>
             <a:pPr>
               <a:lnSpc>
-                <a:spcPct val="135000"/>
+                <a:spcPct val="130000"/>
               </a:lnSpc>
               <a:spcAft>
                 <a:spcPts val="800"/>
               </a:spcAft>
-              <a:defRPr sz="1900">
+              <a:defRPr sz="1800">
                 <a:solidFill>
                   <a:srgbClr val="333333"/>
                 </a:solidFill>
@@ -4660,12 +4659,12 @@
           <a:p>
             <a:pPr lvl="1">
               <a:lnSpc>
-                <a:spcPct val="135000"/>
+                <a:spcPct val="130000"/>
               </a:lnSpc>
               <a:spcAft>
                 <a:spcPts val="800"/>
               </a:spcAft>
-              <a:defRPr sz="1700">
+              <a:defRPr sz="1600">
                 <a:solidFill>
                   <a:srgbClr val="333333"/>
                 </a:solidFill>
@@ -4679,12 +4678,12 @@
           <a:p>
             <a:pPr lvl="1">
               <a:lnSpc>
-                <a:spcPct val="135000"/>
+                <a:spcPct val="130000"/>
               </a:lnSpc>
               <a:spcAft>
                 <a:spcPts val="800"/>
               </a:spcAft>
-              <a:defRPr sz="1700">
+              <a:defRPr sz="1600">
                 <a:solidFill>
                   <a:srgbClr val="333333"/>
                 </a:solidFill>
@@ -4698,12 +4697,12 @@
           <a:p>
             <a:pPr lvl="1">
               <a:lnSpc>
-                <a:spcPct val="135000"/>
+                <a:spcPct val="130000"/>
               </a:lnSpc>
               <a:spcAft>
                 <a:spcPts val="800"/>
               </a:spcAft>
-              <a:defRPr sz="1700">
+              <a:defRPr sz="1600">
                 <a:solidFill>
                   <a:srgbClr val="333333"/>
                 </a:solidFill>
@@ -4717,12 +4716,12 @@
           <a:p>
             <a:pPr>
               <a:lnSpc>
-                <a:spcPct val="135000"/>
+                <a:spcPct val="130000"/>
               </a:lnSpc>
               <a:spcAft>
                 <a:spcPts val="800"/>
               </a:spcAft>
-              <a:defRPr sz="1900">
+              <a:defRPr sz="1800">
                 <a:solidFill>
                   <a:srgbClr val="333333"/>
                 </a:solidFill>
@@ -4736,12 +4735,12 @@
           <a:p>
             <a:pPr>
               <a:lnSpc>
-                <a:spcPct val="135000"/>
+                <a:spcPct val="130000"/>
               </a:lnSpc>
               <a:spcAft>
                 <a:spcPts val="800"/>
               </a:spcAft>
-              <a:defRPr sz="1900">
+              <a:defRPr sz="1800">
                 <a:solidFill>
                   <a:srgbClr val="333333"/>
                 </a:solidFill>
@@ -4749,26 +4748,7 @@
               </a:defRPr>
             </a:pPr>
             <a:r>
-              <a:t>•  Reinicio (ILS): si el incumbente no mejora en stall_limit iteraciones, se elimina una fracción</a:t>
-            </a:r>
-          </a:p>
-          <a:p>
-            <a:pPr lvl="1">
-              <a:lnSpc>
-                <a:spcPct val="135000"/>
-              </a:lnSpc>
-              <a:spcAft>
-                <a:spcPts val="800"/>
-              </a:spcAft>
-              <a:defRPr sz="1700">
-                <a:solidFill>
-                  <a:srgbClr val="333333"/>
-                </a:solidFill>
-                <a:latin typeface="Calibri"/>
-              </a:defRPr>
-            </a:pPr>
-            <a:r>
-              <a:t>–  aleatoria de S (10–30 %) y se reconstruye de forma voraz.</a:t>
+              <a:t>•  Reinicio (ILS): si el incumbente no mejora en stall_limit iteraciones, se elimina una fracción aleatoria de S (10–30 %) y se reconstruye de forma voraz.</a:t>
             </a:r>
           </a:p>
         </p:txBody>
@@ -5143,7 +5123,7 @@
               </a:defRPr>
             </a:pPr>
             <a:r>
-              <a:t>13 / 22</a:t>
+              <a:t>13 / 21</a:t>
             </a:r>
           </a:p>
         </p:txBody>
@@ -5996,7 +5976,7 @@
               </a:defRPr>
             </a:pPr>
             <a:r>
-              <a:t>14 / 22</a:t>
+              <a:t>14 / 21</a:t>
             </a:r>
           </a:p>
         </p:txBody>
@@ -6296,7 +6276,7 @@
                           </a:solidFill>
                           <a:latin typeface="Calibri"/>
                         </a:rPr>
-                        <a:t>0.0204 s</a:t>
+                        <a:t>0.0211 s</a:t>
                       </a:r>
                     </a:p>
                   </a:txBody>
@@ -6321,7 +6301,7 @@
                           </a:solidFill>
                           <a:latin typeface="Calibri"/>
                         </a:rPr>
-                        <a:t>0.0243 s</a:t>
+                        <a:t>0.0251 s</a:t>
                       </a:r>
                     </a:p>
                   </a:txBody>
@@ -6587,7 +6567,7 @@
               </a:defRPr>
             </a:pPr>
             <a:r>
-              <a:t>la solución queda a un solo vértice de distancia. El tiempo hasta la mejor solución es</a:t>
+              <a:t>la solución queda a 1-2 vértices de distancia. El tiempo hasta la mejor solución es</a:t>
             </a:r>
           </a:p>
           <a:p>
@@ -6815,7 +6795,7 @@
               </a:defRPr>
             </a:pPr>
             <a:r>
-              <a:t>15 / 22</a:t>
+              <a:t>15 / 21</a:t>
             </a:r>
           </a:p>
         </p:txBody>
@@ -7440,7 +7420,7 @@
               </a:defRPr>
             </a:pPr>
             <a:r>
-              <a:t>a más de la mitad la desviación estándar. El efecto es mayor en C125.9 (más densa): sin un</a:t>
+              <a:t>la desviación estándar del tamaño final en 48 % (keller4) y 84 % (C125.9). El efecto es mayor</a:t>
             </a:r>
           </a:p>
           <a:p>
@@ -7456,7 +7436,7 @@
               </a:defRPr>
             </a:pPr>
             <a:r>
-              <a:t>mecanismo de diversificación explícito, el Tabú puro queda atrapado en plateaus de la vecindad Swap.</a:t>
+              <a:t>en C125.9 (más densa): sin diversificación explícita, el Tabú puro queda atrapado en plateaus.</a:t>
             </a:r>
           </a:p>
         </p:txBody>
@@ -7632,7 +7612,7 @@
               </a:defRPr>
             </a:pPr>
             <a:r>
-              <a:t>Curvas de convergencia</a:t>
+              <a:t>Convergencia y clique encontrado</a:t>
             </a:r>
           </a:p>
         </p:txBody>
@@ -7668,14 +7648,122 @@
               </a:defRPr>
             </a:pPr>
             <a:r>
-              <a:t>16 / 22</a:t>
+              <a:t>16 / 21</a:t>
+            </a:r>
+          </a:p>
+        </p:txBody>
+      </p:sp>
+      <p:sp>
+        <p:nvSpPr>
+          <p:cNvPr id="6" name="TextBox 5"/>
+          <p:cNvSpPr txBox="1"/>
+          <p:nvPr/>
+        </p:nvSpPr>
+        <p:spPr>
+          <a:xfrm>
+            <a:off x="457200" y="896112"/>
+            <a:ext cx="11277295" cy="320040"/>
+          </a:xfrm>
+          <a:prstGeom prst="rect">
+            <a:avLst/>
+          </a:prstGeom>
+          <a:noFill/>
+        </p:spPr>
+        <p:txBody>
+          <a:bodyPr wrap="square">
+            <a:spAutoFit/>
+          </a:bodyPr>
+          <a:lstStyle/>
+          <a:p>
+            <a:pPr algn="ctr">
+              <a:defRPr sz="1300" b="0" i="1">
+                <a:solidFill>
+                  <a:srgbClr val="333333"/>
+                </a:solidFill>
+                <a:latin typeface="Calibri"/>
+              </a:defRPr>
+            </a:pPr>
+            <a:r>
+              <a:t>Patrón característico de plateaus: expansión voraz, estancamiento en Swap y salto al óptimo tras una perturbación.</a:t>
+            </a:r>
+          </a:p>
+        </p:txBody>
+      </p:sp>
+      <p:sp>
+        <p:nvSpPr>
+          <p:cNvPr id="7" name="TextBox 6"/>
+          <p:cNvSpPr txBox="1"/>
+          <p:nvPr/>
+        </p:nvSpPr>
+        <p:spPr>
+          <a:xfrm>
+            <a:off x="274320" y="1261872"/>
+            <a:ext cx="5623560" cy="292608"/>
+          </a:xfrm>
+          <a:prstGeom prst="rect">
+            <a:avLst/>
+          </a:prstGeom>
+          <a:noFill/>
+        </p:spPr>
+        <p:txBody>
+          <a:bodyPr wrap="square">
+            <a:spAutoFit/>
+          </a:bodyPr>
+          <a:lstStyle/>
+          <a:p>
+            <a:pPr algn="ctr">
+              <a:defRPr sz="1500" b="1" i="0">
+                <a:solidFill>
+                  <a:srgbClr val="00367C"/>
+                </a:solidFill>
+                <a:latin typeface="Calibri"/>
+              </a:defRPr>
+            </a:pPr>
+            <a:r>
+              <a:t>keller4 (ω = 11)</a:t>
+            </a:r>
+          </a:p>
+        </p:txBody>
+      </p:sp>
+      <p:sp>
+        <p:nvSpPr>
+          <p:cNvPr id="8" name="TextBox 7"/>
+          <p:cNvSpPr txBox="1"/>
+          <p:nvPr/>
+        </p:nvSpPr>
+        <p:spPr>
+          <a:xfrm>
+            <a:off x="6291072" y="1261872"/>
+            <a:ext cx="5623560" cy="292608"/>
+          </a:xfrm>
+          <a:prstGeom prst="rect">
+            <a:avLst/>
+          </a:prstGeom>
+          <a:noFill/>
+        </p:spPr>
+        <p:txBody>
+          <a:bodyPr wrap="square">
+            <a:spAutoFit/>
+          </a:bodyPr>
+          <a:lstStyle/>
+          <a:p>
+            <a:pPr algn="ctr">
+              <a:defRPr sz="1500" b="1" i="0">
+                <a:solidFill>
+                  <a:srgbClr val="00367C"/>
+                </a:solidFill>
+                <a:latin typeface="Calibri"/>
+              </a:defRPr>
+            </a:pPr>
+            <a:r>
+              <a:t>C125.9 (ω = 34)</a:t>
             </a:r>
           </a:p>
         </p:txBody>
       </p:sp>
       <p:pic>
         <p:nvPicPr>
-          <p:cNvPr id="6" name="Picture 5" descr="convergencia_keller4.png"/>
+          <p:cNvPr id="9" name="Picture 8" descr="convergencia_keller4.png"/>
           <p:cNvPicPr>
             <a:picLocks noChangeAspect="1"/>
           </p:cNvPicPr>
@@ -7689,8 +7777,8 @@
         </p:blipFill>
         <p:spPr>
           <a:xfrm>
-            <a:off x="274320" y="1188720"/>
-            <a:ext cx="5806440" cy="3732711"/>
+            <a:off x="1522476" y="1572768"/>
+            <a:ext cx="3127248" cy="2010374"/>
           </a:xfrm>
           <a:prstGeom prst="rect">
             <a:avLst/>
@@ -7699,7 +7787,7 @@
       </p:pic>
       <p:pic>
         <p:nvPicPr>
-          <p:cNvPr id="7" name="Picture 6" descr="convergencia_C125.9.png"/>
+          <p:cNvPr id="10" name="Picture 9" descr="convergencia_C125.9.png"/>
           <p:cNvPicPr>
             <a:picLocks noChangeAspect="1"/>
           </p:cNvPicPr>
@@ -7713,53 +7801,65 @@
         </p:blipFill>
         <p:spPr>
           <a:xfrm>
-            <a:off x="6126480" y="1188720"/>
-            <a:ext cx="5806440" cy="3732711"/>
+            <a:off x="7539228" y="1572768"/>
+            <a:ext cx="3127248" cy="2010374"/>
           </a:xfrm>
           <a:prstGeom prst="rect">
             <a:avLst/>
           </a:prstGeom>
         </p:spPr>
       </p:pic>
-      <p:sp>
-        <p:nvSpPr>
-          <p:cNvPr id="8" name="TextBox 7"/>
-          <p:cNvSpPr txBox="1"/>
-          <p:nvPr/>
-        </p:nvSpPr>
-        <p:spPr>
-          <a:xfrm>
-            <a:off x="640080" y="5897880"/>
-            <a:ext cx="10911535" cy="457200"/>
-          </a:xfrm>
-          <a:prstGeom prst="rect">
-            <a:avLst/>
-          </a:prstGeom>
-          <a:noFill/>
-        </p:spPr>
-        <p:txBody>
-          <a:bodyPr wrap="square">
-            <a:spAutoFit/>
-          </a:bodyPr>
-          <a:lstStyle/>
-          <a:p>
-            <a:pPr algn="ctr">
-              <a:defRPr sz="1400" b="0" i="1">
-                <a:solidFill>
-                  <a:srgbClr val="333333"/>
-                </a:solidFill>
-                <a:latin typeface="Calibri"/>
-              </a:defRPr>
-            </a:pPr>
-            <a:r>
-              <a:t>Patrón característico de plateaus: expansión voraz rápida, largo estancamiento en Swap, y salto al óptimo tras una perturbación.</a:t>
-            </a:r>
-          </a:p>
-        </p:txBody>
-      </p:sp>
-      <p:sp>
-        <p:nvSpPr>
-          <p:cNvPr id="9" name="TextBox 8"/>
+      <p:pic>
+        <p:nvPicPr>
+          <p:cNvPr id="11" name="Picture 10" descr="grafo_clique_keller4_tabu.png"/>
+          <p:cNvPicPr>
+            <a:picLocks noChangeAspect="1"/>
+          </p:cNvPicPr>
+          <p:nvPr/>
+        </p:nvPicPr>
+        <p:blipFill>
+          <a:blip r:embed="rId4"/>
+          <a:stretch>
+            <a:fillRect/>
+          </a:stretch>
+        </p:blipFill>
+        <p:spPr>
+          <a:xfrm>
+            <a:off x="1828800" y="3675887"/>
+            <a:ext cx="2514600" cy="2514600"/>
+          </a:xfrm>
+          <a:prstGeom prst="rect">
+            <a:avLst/>
+          </a:prstGeom>
+        </p:spPr>
+      </p:pic>
+      <p:pic>
+        <p:nvPicPr>
+          <p:cNvPr id="12" name="Picture 11" descr="grafo_clique_C125.9_tabu.png"/>
+          <p:cNvPicPr>
+            <a:picLocks noChangeAspect="1"/>
+          </p:cNvPicPr>
+          <p:nvPr/>
+        </p:nvPicPr>
+        <p:blipFill>
+          <a:blip r:embed="rId5"/>
+          <a:stretch>
+            <a:fillRect/>
+          </a:stretch>
+        </p:blipFill>
+        <p:spPr>
+          <a:xfrm>
+            <a:off x="7845552" y="3675887"/>
+            <a:ext cx="2514600" cy="2514600"/>
+          </a:xfrm>
+          <a:prstGeom prst="rect">
+            <a:avLst/>
+          </a:prstGeom>
+        </p:spPr>
+      </p:pic>
+      <p:sp>
+        <p:nvSpPr>
+          <p:cNvPr id="13" name="TextBox 12"/>
           <p:cNvSpPr txBox="1"/>
           <p:nvPr/>
         </p:nvSpPr>
@@ -7820,7 +7920,7 @@
         <p:spPr>
           <a:xfrm>
             <a:off x="0" y="0"/>
-            <a:ext cx="12191695" cy="822960"/>
+            <a:ext cx="12191695" cy="6858000"/>
           </a:xfrm>
           <a:prstGeom prst="rect">
             <a:avLst/>
@@ -7862,8 +7962,8 @@
         </p:nvSpPr>
         <p:spPr>
           <a:xfrm>
-            <a:off x="0" y="822960"/>
-            <a:ext cx="12191695" cy="73152"/>
+            <a:off x="0" y="3794760"/>
+            <a:ext cx="12191695" cy="91440"/>
           </a:xfrm>
           <a:prstGeom prst="rect">
             <a:avLst/>
@@ -7905,8 +8005,8 @@
         </p:nvSpPr>
         <p:spPr>
           <a:xfrm>
-            <a:off x="457200" y="109728"/>
-            <a:ext cx="10362895" cy="640080"/>
+            <a:off x="457200" y="2194560"/>
+            <a:ext cx="11277295" cy="548640"/>
           </a:xfrm>
           <a:prstGeom prst="rect">
             <a:avLst/>
@@ -7914,21 +8014,21 @@
           <a:noFill/>
         </p:spPr>
         <p:txBody>
-          <a:bodyPr wrap="square" lIns="0" rIns="0">
+          <a:bodyPr wrap="square">
             <a:spAutoFit/>
           </a:bodyPr>
           <a:lstStyle/>
           <a:p>
-            <a:pPr>
-              <a:defRPr sz="2600" b="1">
-                <a:solidFill>
-                  <a:srgbClr val="FFFFFF"/>
-                </a:solidFill>
-                <a:latin typeface="Calibri"/>
-              </a:defRPr>
-            </a:pPr>
-            <a:r>
-              <a:t>Clique encontrado por la metaheurística</a:t>
+            <a:pPr algn="ctr">
+              <a:defRPr sz="2200" b="1" i="0">
+                <a:solidFill>
+                  <a:srgbClr val="CFD8E8"/>
+                </a:solidFill>
+                <a:latin typeface="Calibri"/>
+              </a:defRPr>
+            </a:pPr>
+            <a:r>
+              <a:t>COMPARATIVA · INFORME 2</a:t>
             </a:r>
           </a:p>
         </p:txBody>
@@ -7941,8 +8041,8 @@
         </p:nvSpPr>
         <p:spPr>
           <a:xfrm>
-            <a:off x="10820095" y="228600"/>
-            <a:ext cx="1097280" cy="365760"/>
+            <a:off x="457200" y="2743200"/>
+            <a:ext cx="11277295" cy="1005840"/>
           </a:xfrm>
           <a:prstGeom prst="rect">
             <a:avLst/>
@@ -7950,13 +8050,13 @@
           <a:noFill/>
         </p:spPr>
         <p:txBody>
-          <a:bodyPr wrap="none">
+          <a:bodyPr wrap="square">
             <a:spAutoFit/>
           </a:bodyPr>
           <a:lstStyle/>
           <a:p>
-            <a:pPr algn="r">
-              <a:defRPr sz="1200">
+            <a:pPr algn="ctr">
+              <a:defRPr sz="4000" b="1" i="0">
                 <a:solidFill>
                   <a:srgbClr val="FFFFFF"/>
                 </a:solidFill>
@@ -7964,69 +8064,21 @@
               </a:defRPr>
             </a:pPr>
             <a:r>
-              <a:t>17 / 22</a:t>
-            </a:r>
-          </a:p>
-        </p:txBody>
-      </p:sp>
-      <p:pic>
-        <p:nvPicPr>
-          <p:cNvPr id="6" name="Picture 5" descr="grafo_clique_keller4_tabu.png"/>
-          <p:cNvPicPr>
-            <a:picLocks noChangeAspect="1"/>
-          </p:cNvPicPr>
-          <p:nvPr/>
-        </p:nvPicPr>
-        <p:blipFill>
-          <a:blip r:embed="rId2"/>
-          <a:stretch>
-            <a:fillRect/>
-          </a:stretch>
-        </p:blipFill>
-        <p:spPr>
-          <a:xfrm>
-            <a:off x="914400" y="1143000"/>
-            <a:ext cx="5120640" cy="5120640"/>
-          </a:xfrm>
-          <a:prstGeom prst="rect">
-            <a:avLst/>
-          </a:prstGeom>
-        </p:spPr>
-      </p:pic>
-      <p:pic>
-        <p:nvPicPr>
-          <p:cNvPr id="7" name="Picture 6" descr="grafo_clique_C125.9_tabu.png"/>
-          <p:cNvPicPr>
-            <a:picLocks noChangeAspect="1"/>
-          </p:cNvPicPr>
-          <p:nvPr/>
-        </p:nvPicPr>
-        <p:blipFill>
-          <a:blip r:embed="rId3"/>
-          <a:stretch>
-            <a:fillRect/>
-          </a:stretch>
-        </p:blipFill>
-        <p:spPr>
-          <a:xfrm>
-            <a:off x="6400800" y="1143000"/>
-            <a:ext cx="5120640" cy="5120640"/>
-          </a:xfrm>
-          <a:prstGeom prst="rect">
-            <a:avLst/>
-          </a:prstGeom>
-        </p:spPr>
-      </p:pic>
-      <p:sp>
-        <p:nvSpPr>
-          <p:cNvPr id="8" name="TextBox 7"/>
+              <a:t>Contraste de Resultados</a:t>
+            </a:r>
+          </a:p>
+        </p:txBody>
+      </p:sp>
+      <p:sp>
+        <p:nvSpPr>
+          <p:cNvPr id="6" name="TextBox 5"/>
           <p:cNvSpPr txBox="1"/>
           <p:nvPr/>
         </p:nvSpPr>
         <p:spPr>
           <a:xfrm>
-            <a:off x="457200" y="6492240"/>
-            <a:ext cx="11277295" cy="274320"/>
+            <a:off x="1371600" y="4023360"/>
+            <a:ext cx="9448495" cy="731520"/>
           </a:xfrm>
           <a:prstGeom prst="rect">
             <a:avLst/>
@@ -8034,21 +8086,21 @@
           <a:noFill/>
         </p:spPr>
         <p:txBody>
-          <a:bodyPr wrap="none">
+          <a:bodyPr wrap="square">
             <a:spAutoFit/>
           </a:bodyPr>
           <a:lstStyle/>
           <a:p>
-            <a:pPr>
-              <a:defRPr sz="1000" i="1">
-                <a:solidFill>
-                  <a:srgbClr val="333333"/>
-                </a:solidFill>
-                <a:latin typeface="Calibri"/>
-              </a:defRPr>
-            </a:pPr>
-            <a:r>
-              <a:t>Maximum Clique Problem — Optimización en Ingeniería — USACH</a:t>
+            <a:pPr algn="ctr">
+              <a:defRPr sz="1800" b="0" i="1">
+                <a:solidFill>
+                  <a:srgbClr val="FFFFFF"/>
+                </a:solidFill>
+                <a:latin typeface="Calibri"/>
+              </a:defRPr>
+            </a:pPr>
+            <a:r>
+              <a:t>Método exacto (Informe 1) vs. metaheurística (Informe 2)</a:t>
             </a:r>
           </a:p>
         </p:txBody>
@@ -8080,7 +8132,7 @@
         <p:spPr>
           <a:xfrm>
             <a:off x="0" y="0"/>
-            <a:ext cx="12191695" cy="6858000"/>
+            <a:ext cx="12191695" cy="822960"/>
           </a:xfrm>
           <a:prstGeom prst="rect">
             <a:avLst/>
@@ -8122,8 +8174,8 @@
         </p:nvSpPr>
         <p:spPr>
           <a:xfrm>
-            <a:off x="0" y="3794760"/>
-            <a:ext cx="12191695" cy="91440"/>
+            <a:off x="0" y="822960"/>
+            <a:ext cx="12191695" cy="73152"/>
           </a:xfrm>
           <a:prstGeom prst="rect">
             <a:avLst/>
@@ -8165,218 +8217,6 @@
         </p:nvSpPr>
         <p:spPr>
           <a:xfrm>
-            <a:off x="457200" y="2194560"/>
-            <a:ext cx="11277295" cy="548640"/>
-          </a:xfrm>
-          <a:prstGeom prst="rect">
-            <a:avLst/>
-          </a:prstGeom>
-          <a:noFill/>
-        </p:spPr>
-        <p:txBody>
-          <a:bodyPr wrap="square">
-            <a:spAutoFit/>
-          </a:bodyPr>
-          <a:lstStyle/>
-          <a:p>
-            <a:pPr algn="ctr">
-              <a:defRPr sz="2200" b="1" i="0">
-                <a:solidFill>
-                  <a:srgbClr val="CFD8E8"/>
-                </a:solidFill>
-                <a:latin typeface="Calibri"/>
-              </a:defRPr>
-            </a:pPr>
-            <a:r>
-              <a:t>COMPARATIVA · INFORME 2</a:t>
-            </a:r>
-          </a:p>
-        </p:txBody>
-      </p:sp>
-      <p:sp>
-        <p:nvSpPr>
-          <p:cNvPr id="5" name="TextBox 4"/>
-          <p:cNvSpPr txBox="1"/>
-          <p:nvPr/>
-        </p:nvSpPr>
-        <p:spPr>
-          <a:xfrm>
-            <a:off x="457200" y="2743200"/>
-            <a:ext cx="11277295" cy="1005840"/>
-          </a:xfrm>
-          <a:prstGeom prst="rect">
-            <a:avLst/>
-          </a:prstGeom>
-          <a:noFill/>
-        </p:spPr>
-        <p:txBody>
-          <a:bodyPr wrap="square">
-            <a:spAutoFit/>
-          </a:bodyPr>
-          <a:lstStyle/>
-          <a:p>
-            <a:pPr algn="ctr">
-              <a:defRPr sz="4000" b="1" i="0">
-                <a:solidFill>
-                  <a:srgbClr val="FFFFFF"/>
-                </a:solidFill>
-                <a:latin typeface="Calibri"/>
-              </a:defRPr>
-            </a:pPr>
-            <a:r>
-              <a:t>Contraste de Resultados</a:t>
-            </a:r>
-          </a:p>
-        </p:txBody>
-      </p:sp>
-      <p:sp>
-        <p:nvSpPr>
-          <p:cNvPr id="6" name="TextBox 5"/>
-          <p:cNvSpPr txBox="1"/>
-          <p:nvPr/>
-        </p:nvSpPr>
-        <p:spPr>
-          <a:xfrm>
-            <a:off x="1371600" y="4023360"/>
-            <a:ext cx="9448495" cy="731520"/>
-          </a:xfrm>
-          <a:prstGeom prst="rect">
-            <a:avLst/>
-          </a:prstGeom>
-          <a:noFill/>
-        </p:spPr>
-        <p:txBody>
-          <a:bodyPr wrap="square">
-            <a:spAutoFit/>
-          </a:bodyPr>
-          <a:lstStyle/>
-          <a:p>
-            <a:pPr algn="ctr">
-              <a:defRPr sz="1800" b="0" i="1">
-                <a:solidFill>
-                  <a:srgbClr val="FFFFFF"/>
-                </a:solidFill>
-                <a:latin typeface="Calibri"/>
-              </a:defRPr>
-            </a:pPr>
-            <a:r>
-              <a:t>Método exacto (Informe 1) vs. metaheurística (Informe 2)</a:t>
-            </a:r>
-          </a:p>
-        </p:txBody>
-      </p:sp>
-    </p:spTree>
-  </p:cSld>
-  <p:clrMapOvr>
-    <a:masterClrMapping/>
-  </p:clrMapOvr>
-</p:sld>
-</file>
-
-<file path=ppt/slides/slide19.xml><?xml version="1.0" encoding="utf-8"?>
-<p:sld xmlns:a="http://schemas.openxmlformats.org/drawingml/2006/main" xmlns:p="http://schemas.openxmlformats.org/presentationml/2006/main" xmlns:r="http://schemas.openxmlformats.org/officeDocument/2006/relationships">
-  <p:cSld>
-    <p:spTree>
-      <p:nvGrpSpPr>
-        <p:cNvPr id="1" name=""/>
-        <p:cNvGrpSpPr/>
-        <p:nvPr/>
-      </p:nvGrpSpPr>
-      <p:grpSpPr/>
-      <p:sp>
-        <p:nvSpPr>
-          <p:cNvPr id="2" name="Rectangle 1"/>
-          <p:cNvSpPr/>
-          <p:nvPr/>
-        </p:nvSpPr>
-        <p:spPr>
-          <a:xfrm>
-            <a:off x="0" y="0"/>
-            <a:ext cx="12191695" cy="822960"/>
-          </a:xfrm>
-          <a:prstGeom prst="rect">
-            <a:avLst/>
-          </a:prstGeom>
-          <a:solidFill>
-            <a:srgbClr val="00367C"/>
-          </a:solidFill>
-          <a:ln>
-            <a:noFill/>
-          </a:ln>
-        </p:spPr>
-        <p:style>
-          <a:lnRef idx="1">
-            <a:schemeClr val="accent1"/>
-          </a:lnRef>
-          <a:fillRef idx="3">
-            <a:schemeClr val="accent1"/>
-          </a:fillRef>
-          <a:effectRef idx="2">
-            <a:schemeClr val="accent1"/>
-          </a:effectRef>
-          <a:fontRef idx="minor">
-            <a:schemeClr val="lt1"/>
-          </a:fontRef>
-        </p:style>
-        <p:txBody>
-          <a:bodyPr rtlCol="0" anchor="ctr"/>
-          <a:lstStyle/>
-          <a:p>
-            <a:pPr algn="ctr"/>
-          </a:p>
-        </p:txBody>
-      </p:sp>
-      <p:sp>
-        <p:nvSpPr>
-          <p:cNvPr id="3" name="Rectangle 2"/>
-          <p:cNvSpPr/>
-          <p:nvPr/>
-        </p:nvSpPr>
-        <p:spPr>
-          <a:xfrm>
-            <a:off x="0" y="822960"/>
-            <a:ext cx="12191695" cy="73152"/>
-          </a:xfrm>
-          <a:prstGeom prst="rect">
-            <a:avLst/>
-          </a:prstGeom>
-          <a:solidFill>
-            <a:srgbClr val="DA291C"/>
-          </a:solidFill>
-          <a:ln>
-            <a:noFill/>
-          </a:ln>
-        </p:spPr>
-        <p:style>
-          <a:lnRef idx="1">
-            <a:schemeClr val="accent1"/>
-          </a:lnRef>
-          <a:fillRef idx="3">
-            <a:schemeClr val="accent1"/>
-          </a:fillRef>
-          <a:effectRef idx="2">
-            <a:schemeClr val="accent1"/>
-          </a:effectRef>
-          <a:fontRef idx="minor">
-            <a:schemeClr val="lt1"/>
-          </a:fontRef>
-        </p:style>
-        <p:txBody>
-          <a:bodyPr rtlCol="0" anchor="ctr"/>
-          <a:lstStyle/>
-          <a:p>
-            <a:pPr algn="ctr"/>
-          </a:p>
-        </p:txBody>
-      </p:sp>
-      <p:sp>
-        <p:nvSpPr>
-          <p:cNvPr id="4" name="TextBox 3"/>
-          <p:cNvSpPr txBox="1"/>
-          <p:nvPr/>
-        </p:nvSpPr>
-        <p:spPr>
-          <a:xfrm>
             <a:off x="457200" y="109728"/>
             <a:ext cx="10362895" cy="640080"/>
           </a:xfrm>
@@ -8436,7 +8276,7 @@
               </a:defRPr>
             </a:pPr>
             <a:r>
-              <a:t>19 / 22</a:t>
+              <a:t>18 / 21</a:t>
             </a:r>
           </a:p>
         </p:txBody>
@@ -8811,7 +8651,7 @@
                           </a:solidFill>
                           <a:latin typeface="Calibri"/>
                         </a:rPr>
-                        <a:t>0.020 s</a:t>
+                        <a:t>0.021 s</a:t>
                       </a:r>
                     </a:p>
                   </a:txBody>
@@ -9065,7 +8905,7 @@
                           </a:solidFill>
                           <a:latin typeface="Calibri"/>
                         </a:rPr>
-                        <a:t>0.024 s</a:t>
+                        <a:t>0.025 s</a:t>
                       </a:r>
                     </a:p>
                   </a:txBody>
@@ -9328,6 +9168,453 @@
 </p:sld>
 </file>
 
+<file path=ppt/slides/slide19.xml><?xml version="1.0" encoding="utf-8"?>
+<p:sld xmlns:a="http://schemas.openxmlformats.org/drawingml/2006/main" xmlns:p="http://schemas.openxmlformats.org/presentationml/2006/main" xmlns:r="http://schemas.openxmlformats.org/officeDocument/2006/relationships">
+  <p:cSld>
+    <p:spTree>
+      <p:nvGrpSpPr>
+        <p:cNvPr id="1" name=""/>
+        <p:cNvGrpSpPr/>
+        <p:nvPr/>
+      </p:nvGrpSpPr>
+      <p:grpSpPr/>
+      <p:sp>
+        <p:nvSpPr>
+          <p:cNvPr id="2" name="Rectangle 1"/>
+          <p:cNvSpPr/>
+          <p:nvPr/>
+        </p:nvSpPr>
+        <p:spPr>
+          <a:xfrm>
+            <a:off x="0" y="0"/>
+            <a:ext cx="12191695" cy="822960"/>
+          </a:xfrm>
+          <a:prstGeom prst="rect">
+            <a:avLst/>
+          </a:prstGeom>
+          <a:solidFill>
+            <a:srgbClr val="00367C"/>
+          </a:solidFill>
+          <a:ln>
+            <a:noFill/>
+          </a:ln>
+        </p:spPr>
+        <p:style>
+          <a:lnRef idx="1">
+            <a:schemeClr val="accent1"/>
+          </a:lnRef>
+          <a:fillRef idx="3">
+            <a:schemeClr val="accent1"/>
+          </a:fillRef>
+          <a:effectRef idx="2">
+            <a:schemeClr val="accent1"/>
+          </a:effectRef>
+          <a:fontRef idx="minor">
+            <a:schemeClr val="lt1"/>
+          </a:fontRef>
+        </p:style>
+        <p:txBody>
+          <a:bodyPr rtlCol="0" anchor="ctr"/>
+          <a:lstStyle/>
+          <a:p>
+            <a:pPr algn="ctr"/>
+          </a:p>
+        </p:txBody>
+      </p:sp>
+      <p:sp>
+        <p:nvSpPr>
+          <p:cNvPr id="3" name="Rectangle 2"/>
+          <p:cNvSpPr/>
+          <p:nvPr/>
+        </p:nvSpPr>
+        <p:spPr>
+          <a:xfrm>
+            <a:off x="0" y="822960"/>
+            <a:ext cx="12191695" cy="73152"/>
+          </a:xfrm>
+          <a:prstGeom prst="rect">
+            <a:avLst/>
+          </a:prstGeom>
+          <a:solidFill>
+            <a:srgbClr val="DA291C"/>
+          </a:solidFill>
+          <a:ln>
+            <a:noFill/>
+          </a:ln>
+        </p:spPr>
+        <p:style>
+          <a:lnRef idx="1">
+            <a:schemeClr val="accent1"/>
+          </a:lnRef>
+          <a:fillRef idx="3">
+            <a:schemeClr val="accent1"/>
+          </a:fillRef>
+          <a:effectRef idx="2">
+            <a:schemeClr val="accent1"/>
+          </a:effectRef>
+          <a:fontRef idx="minor">
+            <a:schemeClr val="lt1"/>
+          </a:fontRef>
+        </p:style>
+        <p:txBody>
+          <a:bodyPr rtlCol="0" anchor="ctr"/>
+          <a:lstStyle/>
+          <a:p>
+            <a:pPr algn="ctr"/>
+          </a:p>
+        </p:txBody>
+      </p:sp>
+      <p:sp>
+        <p:nvSpPr>
+          <p:cNvPr id="4" name="TextBox 3"/>
+          <p:cNvSpPr txBox="1"/>
+          <p:nvPr/>
+        </p:nvSpPr>
+        <p:spPr>
+          <a:xfrm>
+            <a:off x="457200" y="109728"/>
+            <a:ext cx="10362895" cy="640080"/>
+          </a:xfrm>
+          <a:prstGeom prst="rect">
+            <a:avLst/>
+          </a:prstGeom>
+          <a:noFill/>
+        </p:spPr>
+        <p:txBody>
+          <a:bodyPr wrap="square" lIns="0" rIns="0">
+            <a:spAutoFit/>
+          </a:bodyPr>
+          <a:lstStyle/>
+          <a:p>
+            <a:pPr>
+              <a:defRPr sz="2600" b="1">
+                <a:solidFill>
+                  <a:srgbClr val="FFFFFF"/>
+                </a:solidFill>
+                <a:latin typeface="Calibri"/>
+              </a:defRPr>
+            </a:pPr>
+            <a:r>
+              <a:t>Tiempo de cómputo: el compromiso garantía–escalabilidad</a:t>
+            </a:r>
+          </a:p>
+        </p:txBody>
+      </p:sp>
+      <p:sp>
+        <p:nvSpPr>
+          <p:cNvPr id="5" name="TextBox 4"/>
+          <p:cNvSpPr txBox="1"/>
+          <p:nvPr/>
+        </p:nvSpPr>
+        <p:spPr>
+          <a:xfrm>
+            <a:off x="10820095" y="228600"/>
+            <a:ext cx="1097280" cy="365760"/>
+          </a:xfrm>
+          <a:prstGeom prst="rect">
+            <a:avLst/>
+          </a:prstGeom>
+          <a:noFill/>
+        </p:spPr>
+        <p:txBody>
+          <a:bodyPr wrap="none">
+            <a:spAutoFit/>
+          </a:bodyPr>
+          <a:lstStyle/>
+          <a:p>
+            <a:pPr algn="r">
+              <a:defRPr sz="1200">
+                <a:solidFill>
+                  <a:srgbClr val="FFFFFF"/>
+                </a:solidFill>
+                <a:latin typeface="Calibri"/>
+              </a:defRPr>
+            </a:pPr>
+            <a:r>
+              <a:t>19 / 21</a:t>
+            </a:r>
+          </a:p>
+        </p:txBody>
+      </p:sp>
+      <p:pic>
+        <p:nvPicPr>
+          <p:cNvPr id="6" name="Picture 5" descr="comparacion_tiempos.png"/>
+          <p:cNvPicPr>
+            <a:picLocks noChangeAspect="1"/>
+          </p:cNvPicPr>
+          <p:nvPr/>
+        </p:nvPicPr>
+        <p:blipFill>
+          <a:blip r:embed="rId2"/>
+          <a:stretch>
+            <a:fillRect/>
+          </a:stretch>
+        </p:blipFill>
+        <p:spPr>
+          <a:xfrm>
+            <a:off x="3108960" y="1143000"/>
+            <a:ext cx="5467349" cy="3749039"/>
+          </a:xfrm>
+          <a:prstGeom prst="rect">
+            <a:avLst/>
+          </a:prstGeom>
+        </p:spPr>
+      </p:pic>
+      <p:sp>
+        <p:nvSpPr>
+          <p:cNvPr id="7" name="Rectangle 6"/>
+          <p:cNvSpPr/>
+          <p:nvPr/>
+        </p:nvSpPr>
+        <p:spPr>
+          <a:xfrm>
+            <a:off x="640080" y="4983480"/>
+            <a:ext cx="10911535" cy="1417320"/>
+          </a:xfrm>
+          <a:prstGeom prst="rect">
+            <a:avLst/>
+          </a:prstGeom>
+          <a:solidFill>
+            <a:srgbClr val="EAEAEA"/>
+          </a:solidFill>
+          <a:ln w="19050">
+            <a:solidFill>
+              <a:srgbClr val="00367C"/>
+            </a:solidFill>
+          </a:ln>
+        </p:spPr>
+        <p:style>
+          <a:lnRef idx="1">
+            <a:schemeClr val="accent1"/>
+          </a:lnRef>
+          <a:fillRef idx="3">
+            <a:schemeClr val="accent1"/>
+          </a:fillRef>
+          <a:effectRef idx="2">
+            <a:schemeClr val="accent1"/>
+          </a:effectRef>
+          <a:fontRef idx="minor">
+            <a:schemeClr val="lt1"/>
+          </a:fontRef>
+        </p:style>
+        <p:txBody>
+          <a:bodyPr rtlCol="0" anchor="ctr"/>
+          <a:lstStyle/>
+          <a:p>
+            <a:pPr algn="ctr"/>
+          </a:p>
+        </p:txBody>
+      </p:sp>
+      <p:sp>
+        <p:nvSpPr>
+          <p:cNvPr id="8" name="Rectangle 7"/>
+          <p:cNvSpPr/>
+          <p:nvPr/>
+        </p:nvSpPr>
+        <p:spPr>
+          <a:xfrm>
+            <a:off x="640080" y="4983480"/>
+            <a:ext cx="109728" cy="1417320"/>
+          </a:xfrm>
+          <a:prstGeom prst="rect">
+            <a:avLst/>
+          </a:prstGeom>
+          <a:solidFill>
+            <a:srgbClr val="00367C"/>
+          </a:solidFill>
+          <a:ln>
+            <a:noFill/>
+          </a:ln>
+        </p:spPr>
+        <p:style>
+          <a:lnRef idx="1">
+            <a:schemeClr val="accent1"/>
+          </a:lnRef>
+          <a:fillRef idx="3">
+            <a:schemeClr val="accent1"/>
+          </a:fillRef>
+          <a:effectRef idx="2">
+            <a:schemeClr val="accent1"/>
+          </a:effectRef>
+          <a:fontRef idx="minor">
+            <a:schemeClr val="lt1"/>
+          </a:fontRef>
+        </p:style>
+        <p:txBody>
+          <a:bodyPr rtlCol="0" anchor="ctr"/>
+          <a:lstStyle/>
+          <a:p>
+            <a:pPr algn="ctr"/>
+          </a:p>
+        </p:txBody>
+      </p:sp>
+      <p:sp>
+        <p:nvSpPr>
+          <p:cNvPr id="9" name="TextBox 8"/>
+          <p:cNvSpPr txBox="1"/>
+          <p:nvPr/>
+        </p:nvSpPr>
+        <p:spPr>
+          <a:xfrm>
+            <a:off x="914400" y="5120640"/>
+            <a:ext cx="10545775" cy="411480"/>
+          </a:xfrm>
+          <a:prstGeom prst="rect">
+            <a:avLst/>
+          </a:prstGeom>
+          <a:noFill/>
+        </p:spPr>
+        <p:txBody>
+          <a:bodyPr wrap="none">
+            <a:spAutoFit/>
+          </a:bodyPr>
+          <a:lstStyle/>
+          <a:p>
+            <a:pPr>
+              <a:defRPr sz="1800" b="1">
+                <a:solidFill>
+                  <a:srgbClr val="00367C"/>
+                </a:solidFill>
+                <a:latin typeface="Calibri"/>
+              </a:defRPr>
+            </a:pPr>
+            <a:r>
+              <a:t>Hallazgo central</a:t>
+            </a:r>
+          </a:p>
+        </p:txBody>
+      </p:sp>
+      <p:sp>
+        <p:nvSpPr>
+          <p:cNvPr id="10" name="TextBox 9"/>
+          <p:cNvSpPr txBox="1"/>
+          <p:nvPr/>
+        </p:nvSpPr>
+        <p:spPr>
+          <a:xfrm>
+            <a:off x="914400" y="5669280"/>
+            <a:ext cx="10454335" cy="594360"/>
+          </a:xfrm>
+          <a:prstGeom prst="rect">
+            <a:avLst/>
+          </a:prstGeom>
+          <a:noFill/>
+        </p:spPr>
+        <p:txBody>
+          <a:bodyPr wrap="square">
+            <a:spAutoFit/>
+          </a:bodyPr>
+          <a:lstStyle/>
+          <a:p>
+            <a:pPr>
+              <a:spcAft>
+                <a:spcPts val="400"/>
+              </a:spcAft>
+              <a:defRPr sz="1400">
+                <a:solidFill>
+                  <a:srgbClr val="333333"/>
+                </a:solidFill>
+                <a:latin typeface="Calibri"/>
+              </a:defRPr>
+            </a:pPr>
+            <a:r>
+              <a:t>En keller4 la metaheurística es ~711× más rápida que HiGHS; en C125.9, ~11 900× más rápida</a:t>
+            </a:r>
+          </a:p>
+          <a:p>
+            <a:pPr>
+              <a:spcAft>
+                <a:spcPts val="400"/>
+              </a:spcAft>
+              <a:defRPr sz="1400">
+                <a:solidFill>
+                  <a:srgbClr val="333333"/>
+                </a:solidFill>
+                <a:latin typeface="Calibri"/>
+              </a:defRPr>
+            </a:pPr>
+            <a:r>
+              <a:t>que el B&amp;B manual (que ni siquiera certifica optimalidad). El método exacto certifica el óptimo</a:t>
+            </a:r>
+          </a:p>
+          <a:p>
+            <a:pPr>
+              <a:spcAft>
+                <a:spcPts val="400"/>
+              </a:spcAft>
+              <a:defRPr sz="1400">
+                <a:solidFill>
+                  <a:srgbClr val="333333"/>
+                </a:solidFill>
+                <a:latin typeface="Calibri"/>
+              </a:defRPr>
+            </a:pPr>
+            <a:r>
+              <a:t>cuando logra cerrar el árbol, pero su costo crece sin control con la dificultad de la instancia;</a:t>
+            </a:r>
+          </a:p>
+          <a:p>
+            <a:pPr>
+              <a:spcAft>
+                <a:spcPts val="400"/>
+              </a:spcAft>
+              <a:defRPr sz="1400">
+                <a:solidFill>
+                  <a:srgbClr val="333333"/>
+                </a:solidFill>
+                <a:latin typeface="Calibri"/>
+              </a:defRPr>
+            </a:pPr>
+            <a:r>
+              <a:t>la metaheurística es casi insensible a esa dificultad, a costa de no ofrecer esa garantía.</a:t>
+            </a:r>
+          </a:p>
+        </p:txBody>
+      </p:sp>
+      <p:sp>
+        <p:nvSpPr>
+          <p:cNvPr id="11" name="TextBox 10"/>
+          <p:cNvSpPr txBox="1"/>
+          <p:nvPr/>
+        </p:nvSpPr>
+        <p:spPr>
+          <a:xfrm>
+            <a:off x="457200" y="6492240"/>
+            <a:ext cx="11277295" cy="274320"/>
+          </a:xfrm>
+          <a:prstGeom prst="rect">
+            <a:avLst/>
+          </a:prstGeom>
+          <a:noFill/>
+        </p:spPr>
+        <p:txBody>
+          <a:bodyPr wrap="none">
+            <a:spAutoFit/>
+          </a:bodyPr>
+          <a:lstStyle/>
+          <a:p>
+            <a:pPr>
+              <a:defRPr sz="1000" i="1">
+                <a:solidFill>
+                  <a:srgbClr val="333333"/>
+                </a:solidFill>
+                <a:latin typeface="Calibri"/>
+              </a:defRPr>
+            </a:pPr>
+            <a:r>
+              <a:t>Maximum Clique Problem — Optimización en Ingeniería — USACH</a:t>
+            </a:r>
+          </a:p>
+        </p:txBody>
+      </p:sp>
+    </p:spTree>
+  </p:cSld>
+  <p:clrMapOvr>
+    <a:masterClrMapping/>
+  </p:clrMapOvr>
+</p:sld>
+</file>
+
 <file path=ppt/slides/slide2.xml><?xml version="1.0" encoding="utf-8"?>
 <p:sld xmlns:a="http://schemas.openxmlformats.org/drawingml/2006/main" xmlns:p="http://schemas.openxmlformats.org/presentationml/2006/main" xmlns:r="http://schemas.openxmlformats.org/officeDocument/2006/relationships">
   <p:cSld>
@@ -9491,7 +9778,7 @@
               </a:defRPr>
             </a:pPr>
             <a:r>
-              <a:t>2 / 22</a:t>
+              <a:t>2 / 21</a:t>
             </a:r>
           </a:p>
         </p:txBody>
@@ -9804,7 +10091,7 @@
               </a:defRPr>
             </a:pPr>
             <a:r>
-              <a:t>Tiempo de cómputo: el compromiso garantía–escalabilidad</a:t>
+              <a:t>Conclusiones y trabajo futuro</a:t>
             </a:r>
           </a:p>
         </p:txBody>
@@ -9840,169 +10127,21 @@
               </a:defRPr>
             </a:pPr>
             <a:r>
-              <a:t>20 / 22</a:t>
-            </a:r>
-          </a:p>
-        </p:txBody>
-      </p:sp>
-      <p:pic>
-        <p:nvPicPr>
-          <p:cNvPr id="6" name="Picture 5" descr="comparacion_tiempos.png"/>
-          <p:cNvPicPr>
-            <a:picLocks noChangeAspect="1"/>
-          </p:cNvPicPr>
-          <p:nvPr/>
-        </p:nvPicPr>
-        <p:blipFill>
-          <a:blip r:embed="rId2"/>
-          <a:stretch>
-            <a:fillRect/>
-          </a:stretch>
-        </p:blipFill>
-        <p:spPr>
-          <a:xfrm>
-            <a:off x="3108960" y="1143000"/>
-            <a:ext cx="5467349" cy="3749039"/>
-          </a:xfrm>
-          <a:prstGeom prst="rect">
-            <a:avLst/>
-          </a:prstGeom>
-        </p:spPr>
-      </p:pic>
-      <p:sp>
-        <p:nvSpPr>
-          <p:cNvPr id="7" name="Rectangle 6"/>
-          <p:cNvSpPr/>
-          <p:nvPr/>
-        </p:nvSpPr>
-        <p:spPr>
-          <a:xfrm>
-            <a:off x="640080" y="4983480"/>
-            <a:ext cx="10911535" cy="1417320"/>
-          </a:xfrm>
-          <a:prstGeom prst="rect">
-            <a:avLst/>
-          </a:prstGeom>
-          <a:solidFill>
-            <a:srgbClr val="EAEAEA"/>
-          </a:solidFill>
-          <a:ln w="19050">
-            <a:solidFill>
-              <a:srgbClr val="00367C"/>
-            </a:solidFill>
-          </a:ln>
-        </p:spPr>
-        <p:style>
-          <a:lnRef idx="1">
-            <a:schemeClr val="accent1"/>
-          </a:lnRef>
-          <a:fillRef idx="3">
-            <a:schemeClr val="accent1"/>
-          </a:fillRef>
-          <a:effectRef idx="2">
-            <a:schemeClr val="accent1"/>
-          </a:effectRef>
-          <a:fontRef idx="minor">
-            <a:schemeClr val="lt1"/>
-          </a:fontRef>
-        </p:style>
-        <p:txBody>
-          <a:bodyPr rtlCol="0" anchor="ctr"/>
-          <a:lstStyle/>
-          <a:p>
-            <a:pPr algn="ctr"/>
-          </a:p>
-        </p:txBody>
-      </p:sp>
-      <p:sp>
-        <p:nvSpPr>
-          <p:cNvPr id="8" name="Rectangle 7"/>
-          <p:cNvSpPr/>
-          <p:nvPr/>
-        </p:nvSpPr>
-        <p:spPr>
-          <a:xfrm>
-            <a:off x="640080" y="4983480"/>
-            <a:ext cx="109728" cy="1417320"/>
-          </a:xfrm>
-          <a:prstGeom prst="rect">
-            <a:avLst/>
-          </a:prstGeom>
-          <a:solidFill>
-            <a:srgbClr val="00367C"/>
-          </a:solidFill>
-          <a:ln>
-            <a:noFill/>
-          </a:ln>
-        </p:spPr>
-        <p:style>
-          <a:lnRef idx="1">
-            <a:schemeClr val="accent1"/>
-          </a:lnRef>
-          <a:fillRef idx="3">
-            <a:schemeClr val="accent1"/>
-          </a:fillRef>
-          <a:effectRef idx="2">
-            <a:schemeClr val="accent1"/>
-          </a:effectRef>
-          <a:fontRef idx="minor">
-            <a:schemeClr val="lt1"/>
-          </a:fontRef>
-        </p:style>
-        <p:txBody>
-          <a:bodyPr rtlCol="0" anchor="ctr"/>
-          <a:lstStyle/>
-          <a:p>
-            <a:pPr algn="ctr"/>
-          </a:p>
-        </p:txBody>
-      </p:sp>
-      <p:sp>
-        <p:nvSpPr>
-          <p:cNvPr id="9" name="TextBox 8"/>
+              <a:t>20 / 21</a:t>
+            </a:r>
+          </a:p>
+        </p:txBody>
+      </p:sp>
+      <p:sp>
+        <p:nvSpPr>
+          <p:cNvPr id="6" name="TextBox 5"/>
           <p:cNvSpPr txBox="1"/>
           <p:nvPr/>
         </p:nvSpPr>
         <p:spPr>
           <a:xfrm>
-            <a:off x="914400" y="5120640"/>
-            <a:ext cx="10545775" cy="411480"/>
-          </a:xfrm>
-          <a:prstGeom prst="rect">
-            <a:avLst/>
-          </a:prstGeom>
-          <a:noFill/>
-        </p:spPr>
-        <p:txBody>
-          <a:bodyPr wrap="none">
-            <a:spAutoFit/>
-          </a:bodyPr>
-          <a:lstStyle/>
-          <a:p>
-            <a:pPr>
-              <a:defRPr sz="1800" b="1">
-                <a:solidFill>
-                  <a:srgbClr val="00367C"/>
-                </a:solidFill>
-                <a:latin typeface="Calibri"/>
-              </a:defRPr>
-            </a:pPr>
-            <a:r>
-              <a:t>Hallazgo central</a:t>
-            </a:r>
-          </a:p>
-        </p:txBody>
-      </p:sp>
-      <p:sp>
-        <p:nvSpPr>
-          <p:cNvPr id="10" name="TextBox 9"/>
-          <p:cNvSpPr txBox="1"/>
-          <p:nvPr/>
-        </p:nvSpPr>
-        <p:spPr>
-          <a:xfrm>
-            <a:off x="914400" y="5669280"/>
-            <a:ext cx="10454335" cy="594360"/>
+            <a:off x="640080" y="1280160"/>
+            <a:ext cx="7315200" cy="457200"/>
           </a:xfrm>
           <a:prstGeom prst="rect">
             <a:avLst/>
@@ -10015,11 +10154,50 @@
           </a:bodyPr>
           <a:lstStyle/>
           <a:p>
+            <a:pPr algn="l">
+              <a:defRPr sz="2000" b="1" i="0">
+                <a:solidFill>
+                  <a:srgbClr val="00367C"/>
+                </a:solidFill>
+                <a:latin typeface="Calibri"/>
+              </a:defRPr>
+            </a:pPr>
+            <a:r>
+              <a:t>Conclusiones principales</a:t>
+            </a:r>
+          </a:p>
+        </p:txBody>
+      </p:sp>
+      <p:sp>
+        <p:nvSpPr>
+          <p:cNvPr id="7" name="TextBox 6"/>
+          <p:cNvSpPr txBox="1"/>
+          <p:nvPr/>
+        </p:nvSpPr>
+        <p:spPr>
+          <a:xfrm>
+            <a:off x="640080" y="1737360"/>
+            <a:ext cx="10911535" cy="4572000"/>
+          </a:xfrm>
+          <a:prstGeom prst="rect">
+            <a:avLst/>
+          </a:prstGeom>
+          <a:noFill/>
+        </p:spPr>
+        <p:txBody>
+          <a:bodyPr wrap="square">
+            <a:spAutoFit/>
+          </a:bodyPr>
+          <a:lstStyle/>
+          <a:p>
             <a:pPr>
+              <a:lnSpc>
+                <a:spcPct val="115000"/>
+              </a:lnSpc>
               <a:spcAft>
-                <a:spcPts val="400"/>
+                <a:spcPts val="800"/>
               </a:spcAft>
-              <a:defRPr sz="1400">
+              <a:defRPr sz="1600">
                 <a:solidFill>
                   <a:srgbClr val="333333"/>
                 </a:solidFill>
@@ -10027,15 +10205,18 @@
               </a:defRPr>
             </a:pPr>
             <a:r>
-              <a:t>En keller4 la metaheurística es ~735× más rápida que HiGHS; en C125.9, ~12 000× más rápida</a:t>
+              <a:t>•  El método exacto certifica ω=11 en keller4 (12–18 s), pero su costo crece sin control en instancias densas.</a:t>
             </a:r>
           </a:p>
           <a:p>
             <a:pPr>
+              <a:lnSpc>
+                <a:spcPct val="115000"/>
+              </a:lnSpc>
               <a:spcAft>
-                <a:spcPts val="400"/>
+                <a:spcPts val="800"/>
               </a:spcAft>
-              <a:defRPr sz="1400">
+              <a:defRPr sz="1600">
                 <a:solidFill>
                   <a:srgbClr val="333333"/>
                 </a:solidFill>
@@ -10043,15 +10224,18 @@
               </a:defRPr>
             </a:pPr>
             <a:r>
-              <a:t>que el B&amp;B manual (que ni siquiera certifica optimalidad). El método exacto certifica el óptimo</a:t>
+              <a:t>•  La metaheurística Tabú+ILS, construida sobre el diseño de Tarea 1, alcanza el óptimo en 93–97 % de las corridas.</a:t>
             </a:r>
           </a:p>
           <a:p>
             <a:pPr>
+              <a:lnSpc>
+                <a:spcPct val="115000"/>
+              </a:lnSpc>
               <a:spcAft>
-                <a:spcPts val="400"/>
+                <a:spcPts val="800"/>
               </a:spcAft>
-              <a:defRPr sz="1400">
+              <a:defRPr sz="1600">
                 <a:solidFill>
                   <a:srgbClr val="333333"/>
                 </a:solidFill>
@@ -10059,15 +10243,18 @@
               </a:defRPr>
             </a:pPr>
             <a:r>
-              <a:t>cuando logra cerrar el árbol, pero su costo crece sin control con la dificultad de la instancia;</a:t>
+              <a:t>•  El mecanismo de reinicio (ILS) es indispensable: sin él, la tasa de éxito cae 20–30 puntos.</a:t>
             </a:r>
           </a:p>
           <a:p>
             <a:pPr>
+              <a:lnSpc>
+                <a:spcPct val="115000"/>
+              </a:lnSpc>
               <a:spcAft>
-                <a:spcPts val="400"/>
+                <a:spcPts val="800"/>
               </a:spcAft>
-              <a:defRPr sz="1400">
+              <a:defRPr sz="1600">
                 <a:solidFill>
                   <a:srgbClr val="333333"/>
                 </a:solidFill>
@@ -10075,14 +10262,130 @@
               </a:defRPr>
             </a:pPr>
             <a:r>
-              <a:t>la metaheurística es casi insensible a esa dificultad, a costa de no ofrecer esa garantía.</a:t>
-            </a:r>
-          </a:p>
-        </p:txBody>
-      </p:sp>
-      <p:sp>
-        <p:nvSpPr>
-          <p:cNvPr id="11" name="TextBox 10"/>
+              <a:t>•  El contraste confirma el compromiso teórico garantía vs. escalabilidad entre ambos paradigmas.</a:t>
+            </a:r>
+          </a:p>
+        </p:txBody>
+      </p:sp>
+      <p:sp>
+        <p:nvSpPr>
+          <p:cNvPr id="8" name="TextBox 7"/>
+          <p:cNvSpPr txBox="1"/>
+          <p:nvPr/>
+        </p:nvSpPr>
+        <p:spPr>
+          <a:xfrm>
+            <a:off x="640080" y="4343400"/>
+            <a:ext cx="7315200" cy="457200"/>
+          </a:xfrm>
+          <a:prstGeom prst="rect">
+            <a:avLst/>
+          </a:prstGeom>
+          <a:noFill/>
+        </p:spPr>
+        <p:txBody>
+          <a:bodyPr wrap="square">
+            <a:spAutoFit/>
+          </a:bodyPr>
+          <a:lstStyle/>
+          <a:p>
+            <a:pPr algn="l">
+              <a:defRPr sz="2000" b="1" i="0">
+                <a:solidFill>
+                  <a:srgbClr val="DA291C"/>
+                </a:solidFill>
+                <a:latin typeface="Calibri"/>
+              </a:defRPr>
+            </a:pPr>
+            <a:r>
+              <a:t>Trabajo futuro</a:t>
+            </a:r>
+          </a:p>
+        </p:txBody>
+      </p:sp>
+      <p:sp>
+        <p:nvSpPr>
+          <p:cNvPr id="9" name="TextBox 8"/>
+          <p:cNvSpPr txBox="1"/>
+          <p:nvPr/>
+        </p:nvSpPr>
+        <p:spPr>
+          <a:xfrm>
+            <a:off x="640080" y="4754880"/>
+            <a:ext cx="10911535" cy="1554480"/>
+          </a:xfrm>
+          <a:prstGeom prst="rect">
+            <a:avLst/>
+          </a:prstGeom>
+          <a:noFill/>
+        </p:spPr>
+        <p:txBody>
+          <a:bodyPr wrap="square">
+            <a:spAutoFit/>
+          </a:bodyPr>
+          <a:lstStyle/>
+          <a:p>
+            <a:pPr>
+              <a:lnSpc>
+                <a:spcPct val="115000"/>
+              </a:lnSpc>
+              <a:spcAft>
+                <a:spcPts val="800"/>
+              </a:spcAft>
+              <a:defRPr sz="1600">
+                <a:solidFill>
+                  <a:srgbClr val="333333"/>
+                </a:solidFill>
+                <a:latin typeface="Calibri"/>
+              </a:defRPr>
+            </a:pPr>
+            <a:r>
+              <a:t>•  Evaluar sobre instancias DIMACS de mayor tamaño (n &gt; 500).</a:t>
+            </a:r>
+          </a:p>
+          <a:p>
+            <a:pPr>
+              <a:lnSpc>
+                <a:spcPct val="115000"/>
+              </a:lnSpc>
+              <a:spcAft>
+                <a:spcPts val="800"/>
+              </a:spcAft>
+              <a:defRPr sz="1600">
+                <a:solidFill>
+                  <a:srgbClr val="333333"/>
+                </a:solidFill>
+                <a:latin typeface="Calibri"/>
+              </a:defRPr>
+            </a:pPr>
+            <a:r>
+              <a:t>•  Comparar contra VNS (Hansen &amp; Mladenović, 2007) sobre las mismas vecindades Add/Drop/Swap.</a:t>
+            </a:r>
+          </a:p>
+          <a:p>
+            <a:pPr>
+              <a:lnSpc>
+                <a:spcPct val="115000"/>
+              </a:lnSpc>
+              <a:spcAft>
+                <a:spcPts val="800"/>
+              </a:spcAft>
+              <a:defRPr sz="1600">
+                <a:solidFill>
+                  <a:srgbClr val="333333"/>
+                </a:solidFill>
+                <a:latin typeface="Calibri"/>
+              </a:defRPr>
+            </a:pPr>
+            <a:r>
+              <a:t>•  Ajuste reactivo del tenure; certificar C125.9 con un solver MIP formal (HiGHS).</a:t>
+            </a:r>
+          </a:p>
+        </p:txBody>
+      </p:sp>
+      <p:sp>
+        <p:nvSpPr>
+          <p:cNvPr id="10" name="TextBox 9"/>
           <p:cNvSpPr txBox="1"/>
           <p:nvPr/>
         </p:nvSpPr>
@@ -10143,469 +10446,6 @@
         <p:spPr>
           <a:xfrm>
             <a:off x="0" y="0"/>
-            <a:ext cx="12191695" cy="822960"/>
-          </a:xfrm>
-          <a:prstGeom prst="rect">
-            <a:avLst/>
-          </a:prstGeom>
-          <a:solidFill>
-            <a:srgbClr val="00367C"/>
-          </a:solidFill>
-          <a:ln>
-            <a:noFill/>
-          </a:ln>
-        </p:spPr>
-        <p:style>
-          <a:lnRef idx="1">
-            <a:schemeClr val="accent1"/>
-          </a:lnRef>
-          <a:fillRef idx="3">
-            <a:schemeClr val="accent1"/>
-          </a:fillRef>
-          <a:effectRef idx="2">
-            <a:schemeClr val="accent1"/>
-          </a:effectRef>
-          <a:fontRef idx="minor">
-            <a:schemeClr val="lt1"/>
-          </a:fontRef>
-        </p:style>
-        <p:txBody>
-          <a:bodyPr rtlCol="0" anchor="ctr"/>
-          <a:lstStyle/>
-          <a:p>
-            <a:pPr algn="ctr"/>
-          </a:p>
-        </p:txBody>
-      </p:sp>
-      <p:sp>
-        <p:nvSpPr>
-          <p:cNvPr id="3" name="Rectangle 2"/>
-          <p:cNvSpPr/>
-          <p:nvPr/>
-        </p:nvSpPr>
-        <p:spPr>
-          <a:xfrm>
-            <a:off x="0" y="822960"/>
-            <a:ext cx="12191695" cy="73152"/>
-          </a:xfrm>
-          <a:prstGeom prst="rect">
-            <a:avLst/>
-          </a:prstGeom>
-          <a:solidFill>
-            <a:srgbClr val="DA291C"/>
-          </a:solidFill>
-          <a:ln>
-            <a:noFill/>
-          </a:ln>
-        </p:spPr>
-        <p:style>
-          <a:lnRef idx="1">
-            <a:schemeClr val="accent1"/>
-          </a:lnRef>
-          <a:fillRef idx="3">
-            <a:schemeClr val="accent1"/>
-          </a:fillRef>
-          <a:effectRef idx="2">
-            <a:schemeClr val="accent1"/>
-          </a:effectRef>
-          <a:fontRef idx="minor">
-            <a:schemeClr val="lt1"/>
-          </a:fontRef>
-        </p:style>
-        <p:txBody>
-          <a:bodyPr rtlCol="0" anchor="ctr"/>
-          <a:lstStyle/>
-          <a:p>
-            <a:pPr algn="ctr"/>
-          </a:p>
-        </p:txBody>
-      </p:sp>
-      <p:sp>
-        <p:nvSpPr>
-          <p:cNvPr id="4" name="TextBox 3"/>
-          <p:cNvSpPr txBox="1"/>
-          <p:nvPr/>
-        </p:nvSpPr>
-        <p:spPr>
-          <a:xfrm>
-            <a:off x="457200" y="109728"/>
-            <a:ext cx="10362895" cy="640080"/>
-          </a:xfrm>
-          <a:prstGeom prst="rect">
-            <a:avLst/>
-          </a:prstGeom>
-          <a:noFill/>
-        </p:spPr>
-        <p:txBody>
-          <a:bodyPr wrap="square" lIns="0" rIns="0">
-            <a:spAutoFit/>
-          </a:bodyPr>
-          <a:lstStyle/>
-          <a:p>
-            <a:pPr>
-              <a:defRPr sz="2600" b="1">
-                <a:solidFill>
-                  <a:srgbClr val="FFFFFF"/>
-                </a:solidFill>
-                <a:latin typeface="Calibri"/>
-              </a:defRPr>
-            </a:pPr>
-            <a:r>
-              <a:t>Conclusiones y trabajo futuro</a:t>
-            </a:r>
-          </a:p>
-        </p:txBody>
-      </p:sp>
-      <p:sp>
-        <p:nvSpPr>
-          <p:cNvPr id="5" name="TextBox 4"/>
-          <p:cNvSpPr txBox="1"/>
-          <p:nvPr/>
-        </p:nvSpPr>
-        <p:spPr>
-          <a:xfrm>
-            <a:off x="10820095" y="228600"/>
-            <a:ext cx="1097280" cy="365760"/>
-          </a:xfrm>
-          <a:prstGeom prst="rect">
-            <a:avLst/>
-          </a:prstGeom>
-          <a:noFill/>
-        </p:spPr>
-        <p:txBody>
-          <a:bodyPr wrap="none">
-            <a:spAutoFit/>
-          </a:bodyPr>
-          <a:lstStyle/>
-          <a:p>
-            <a:pPr algn="r">
-              <a:defRPr sz="1200">
-                <a:solidFill>
-                  <a:srgbClr val="FFFFFF"/>
-                </a:solidFill>
-                <a:latin typeface="Calibri"/>
-              </a:defRPr>
-            </a:pPr>
-            <a:r>
-              <a:t>21 / 22</a:t>
-            </a:r>
-          </a:p>
-        </p:txBody>
-      </p:sp>
-      <p:sp>
-        <p:nvSpPr>
-          <p:cNvPr id="6" name="TextBox 5"/>
-          <p:cNvSpPr txBox="1"/>
-          <p:nvPr/>
-        </p:nvSpPr>
-        <p:spPr>
-          <a:xfrm>
-            <a:off x="640080" y="1280160"/>
-            <a:ext cx="7315200" cy="457200"/>
-          </a:xfrm>
-          <a:prstGeom prst="rect">
-            <a:avLst/>
-          </a:prstGeom>
-          <a:noFill/>
-        </p:spPr>
-        <p:txBody>
-          <a:bodyPr wrap="square">
-            <a:spAutoFit/>
-          </a:bodyPr>
-          <a:lstStyle/>
-          <a:p>
-            <a:pPr algn="l">
-              <a:defRPr sz="2000" b="1" i="0">
-                <a:solidFill>
-                  <a:srgbClr val="00367C"/>
-                </a:solidFill>
-                <a:latin typeface="Calibri"/>
-              </a:defRPr>
-            </a:pPr>
-            <a:r>
-              <a:t>Conclusiones principales</a:t>
-            </a:r>
-          </a:p>
-        </p:txBody>
-      </p:sp>
-      <p:sp>
-        <p:nvSpPr>
-          <p:cNvPr id="7" name="TextBox 6"/>
-          <p:cNvSpPr txBox="1"/>
-          <p:nvPr/>
-        </p:nvSpPr>
-        <p:spPr>
-          <a:xfrm>
-            <a:off x="640080" y="1737360"/>
-            <a:ext cx="10911535" cy="4572000"/>
-          </a:xfrm>
-          <a:prstGeom prst="rect">
-            <a:avLst/>
-          </a:prstGeom>
-          <a:noFill/>
-        </p:spPr>
-        <p:txBody>
-          <a:bodyPr wrap="square">
-            <a:spAutoFit/>
-          </a:bodyPr>
-          <a:lstStyle/>
-          <a:p>
-            <a:pPr>
-              <a:lnSpc>
-                <a:spcPct val="115000"/>
-              </a:lnSpc>
-              <a:spcAft>
-                <a:spcPts val="800"/>
-              </a:spcAft>
-              <a:defRPr sz="1600">
-                <a:solidFill>
-                  <a:srgbClr val="333333"/>
-                </a:solidFill>
-                <a:latin typeface="Calibri"/>
-              </a:defRPr>
-            </a:pPr>
-            <a:r>
-              <a:t>•  El método exacto certifica ω=11 en keller4 (12–18 s), pero su costo crece sin control en instancias densas.</a:t>
-            </a:r>
-          </a:p>
-          <a:p>
-            <a:pPr>
-              <a:lnSpc>
-                <a:spcPct val="115000"/>
-              </a:lnSpc>
-              <a:spcAft>
-                <a:spcPts val="800"/>
-              </a:spcAft>
-              <a:defRPr sz="1600">
-                <a:solidFill>
-                  <a:srgbClr val="333333"/>
-                </a:solidFill>
-                <a:latin typeface="Calibri"/>
-              </a:defRPr>
-            </a:pPr>
-            <a:r>
-              <a:t>•  La metaheurística Tabú+ILS, construida sobre el diseño de Tarea 1, alcanza el óptimo en 93–97 % de las corridas.</a:t>
-            </a:r>
-          </a:p>
-          <a:p>
-            <a:pPr>
-              <a:lnSpc>
-                <a:spcPct val="115000"/>
-              </a:lnSpc>
-              <a:spcAft>
-                <a:spcPts val="800"/>
-              </a:spcAft>
-              <a:defRPr sz="1600">
-                <a:solidFill>
-                  <a:srgbClr val="333333"/>
-                </a:solidFill>
-                <a:latin typeface="Calibri"/>
-              </a:defRPr>
-            </a:pPr>
-            <a:r>
-              <a:t>•  El mecanismo de reinicio (ILS) es indispensable: sin él, la tasa de éxito cae 20–30 puntos.</a:t>
-            </a:r>
-          </a:p>
-          <a:p>
-            <a:pPr>
-              <a:lnSpc>
-                <a:spcPct val="115000"/>
-              </a:lnSpc>
-              <a:spcAft>
-                <a:spcPts val="800"/>
-              </a:spcAft>
-              <a:defRPr sz="1600">
-                <a:solidFill>
-                  <a:srgbClr val="333333"/>
-                </a:solidFill>
-                <a:latin typeface="Calibri"/>
-              </a:defRPr>
-            </a:pPr>
-            <a:r>
-              <a:t>•  El contraste confirma el compromiso teórico garantía vs. escalabilidad entre ambos paradigmas.</a:t>
-            </a:r>
-          </a:p>
-        </p:txBody>
-      </p:sp>
-      <p:sp>
-        <p:nvSpPr>
-          <p:cNvPr id="8" name="TextBox 7"/>
-          <p:cNvSpPr txBox="1"/>
-          <p:nvPr/>
-        </p:nvSpPr>
-        <p:spPr>
-          <a:xfrm>
-            <a:off x="640080" y="4343400"/>
-            <a:ext cx="7315200" cy="457200"/>
-          </a:xfrm>
-          <a:prstGeom prst="rect">
-            <a:avLst/>
-          </a:prstGeom>
-          <a:noFill/>
-        </p:spPr>
-        <p:txBody>
-          <a:bodyPr wrap="square">
-            <a:spAutoFit/>
-          </a:bodyPr>
-          <a:lstStyle/>
-          <a:p>
-            <a:pPr algn="l">
-              <a:defRPr sz="2000" b="1" i="0">
-                <a:solidFill>
-                  <a:srgbClr val="DA291C"/>
-                </a:solidFill>
-                <a:latin typeface="Calibri"/>
-              </a:defRPr>
-            </a:pPr>
-            <a:r>
-              <a:t>Trabajo futuro</a:t>
-            </a:r>
-          </a:p>
-        </p:txBody>
-      </p:sp>
-      <p:sp>
-        <p:nvSpPr>
-          <p:cNvPr id="9" name="TextBox 8"/>
-          <p:cNvSpPr txBox="1"/>
-          <p:nvPr/>
-        </p:nvSpPr>
-        <p:spPr>
-          <a:xfrm>
-            <a:off x="640080" y="4754880"/>
-            <a:ext cx="10911535" cy="1554480"/>
-          </a:xfrm>
-          <a:prstGeom prst="rect">
-            <a:avLst/>
-          </a:prstGeom>
-          <a:noFill/>
-        </p:spPr>
-        <p:txBody>
-          <a:bodyPr wrap="square">
-            <a:spAutoFit/>
-          </a:bodyPr>
-          <a:lstStyle/>
-          <a:p>
-            <a:pPr>
-              <a:lnSpc>
-                <a:spcPct val="115000"/>
-              </a:lnSpc>
-              <a:spcAft>
-                <a:spcPts val="800"/>
-              </a:spcAft>
-              <a:defRPr sz="1600">
-                <a:solidFill>
-                  <a:srgbClr val="333333"/>
-                </a:solidFill>
-                <a:latin typeface="Calibri"/>
-              </a:defRPr>
-            </a:pPr>
-            <a:r>
-              <a:t>•  Evaluar sobre instancias DIMACS de mayor tamaño (n &gt; 500).</a:t>
-            </a:r>
-          </a:p>
-          <a:p>
-            <a:pPr>
-              <a:lnSpc>
-                <a:spcPct val="115000"/>
-              </a:lnSpc>
-              <a:spcAft>
-                <a:spcPts val="800"/>
-              </a:spcAft>
-              <a:defRPr sz="1600">
-                <a:solidFill>
-                  <a:srgbClr val="333333"/>
-                </a:solidFill>
-                <a:latin typeface="Calibri"/>
-              </a:defRPr>
-            </a:pPr>
-            <a:r>
-              <a:t>•  Comparar contra VNS sobre las mismas vecindades Add/Drop/Swap.</a:t>
-            </a:r>
-          </a:p>
-          <a:p>
-            <a:pPr>
-              <a:lnSpc>
-                <a:spcPct val="115000"/>
-              </a:lnSpc>
-              <a:spcAft>
-                <a:spcPts val="800"/>
-              </a:spcAft>
-              <a:defRPr sz="1600">
-                <a:solidFill>
-                  <a:srgbClr val="333333"/>
-                </a:solidFill>
-                <a:latin typeface="Calibri"/>
-              </a:defRPr>
-            </a:pPr>
-            <a:r>
-              <a:t>•  Ajuste reactivo del tenure; certificar C125.9 con un solver MIP formal (HiGHS).</a:t>
-            </a:r>
-          </a:p>
-        </p:txBody>
-      </p:sp>
-      <p:sp>
-        <p:nvSpPr>
-          <p:cNvPr id="10" name="TextBox 9"/>
-          <p:cNvSpPr txBox="1"/>
-          <p:nvPr/>
-        </p:nvSpPr>
-        <p:spPr>
-          <a:xfrm>
-            <a:off x="457200" y="6492240"/>
-            <a:ext cx="11277295" cy="274320"/>
-          </a:xfrm>
-          <a:prstGeom prst="rect">
-            <a:avLst/>
-          </a:prstGeom>
-          <a:noFill/>
-        </p:spPr>
-        <p:txBody>
-          <a:bodyPr wrap="none">
-            <a:spAutoFit/>
-          </a:bodyPr>
-          <a:lstStyle/>
-          <a:p>
-            <a:pPr>
-              <a:defRPr sz="1000" i="1">
-                <a:solidFill>
-                  <a:srgbClr val="333333"/>
-                </a:solidFill>
-                <a:latin typeface="Calibri"/>
-              </a:defRPr>
-            </a:pPr>
-            <a:r>
-              <a:t>Maximum Clique Problem — Optimización en Ingeniería — USACH</a:t>
-            </a:r>
-          </a:p>
-        </p:txBody>
-      </p:sp>
-    </p:spTree>
-  </p:cSld>
-  <p:clrMapOvr>
-    <a:masterClrMapping/>
-  </p:clrMapOvr>
-</p:sld>
-</file>
-
-<file path=ppt/slides/slide22.xml><?xml version="1.0" encoding="utf-8"?>
-<p:sld xmlns:a="http://schemas.openxmlformats.org/drawingml/2006/main" xmlns:p="http://schemas.openxmlformats.org/presentationml/2006/main" xmlns:r="http://schemas.openxmlformats.org/officeDocument/2006/relationships">
-  <p:cSld>
-    <p:spTree>
-      <p:nvGrpSpPr>
-        <p:cNvPr id="1" name=""/>
-        <p:cNvGrpSpPr/>
-        <p:nvPr/>
-      </p:nvGrpSpPr>
-      <p:grpSpPr/>
-      <p:sp>
-        <p:nvSpPr>
-          <p:cNvPr id="2" name="Rectangle 1"/>
-          <p:cNvSpPr/>
-          <p:nvPr/>
-        </p:nvSpPr>
-        <p:spPr>
-          <a:xfrm>
-            <a:off x="0" y="0"/>
             <a:ext cx="12191695" cy="6858000"/>
           </a:xfrm>
           <a:prstGeom prst="rect">
@@ -10998,7 +10838,7 @@
               </a:defRPr>
             </a:pPr>
             <a:r>
-              <a:t>3 / 22</a:t>
+              <a:t>3 / 21</a:t>
             </a:r>
           </a:p>
         </p:txBody>
@@ -11416,7 +11256,7 @@
               <a:spcAft>
                 <a:spcPts val="400"/>
               </a:spcAft>
-              <a:defRPr sz="1400">
+              <a:defRPr sz="1300">
                 <a:solidFill>
                   <a:srgbClr val="333333"/>
                 </a:solidFill>
@@ -11424,7 +11264,7 @@
               </a:defRPr>
             </a:pPr>
             <a:r>
-              <a:t>Maximum Independent Set</a:t>
+              <a:t>Clique máximo en G = Independent Set máximo</a:t>
             </a:r>
           </a:p>
           <a:p>
@@ -11432,7 +11272,7 @@
               <a:spcAft>
                 <a:spcPts val="400"/>
               </a:spcAft>
-              <a:defRPr sz="1400">
+              <a:defRPr sz="1300">
                 <a:solidFill>
                   <a:srgbClr val="333333"/>
                 </a:solidFill>
@@ -11440,7 +11280,7 @@
               </a:defRPr>
             </a:pPr>
             <a:r>
-              <a:t>Minimum Vertex Cover</a:t>
+              <a:t>en el complemento de G.</a:t>
             </a:r>
           </a:p>
           <a:p>
@@ -11448,36 +11288,36 @@
               <a:spcAft>
                 <a:spcPts val="400"/>
               </a:spcAft>
-              <a:defRPr sz="1400">
+              <a:defRPr sz="1300">
                 <a:solidFill>
                   <a:srgbClr val="333333"/>
                 </a:solidFill>
                 <a:latin typeface="Calibri"/>
               </a:defRPr>
             </a:pPr>
-            <a:r>
-              <a:t>(equivalentes vía complemento del grafo)</a:t>
-            </a:r>
           </a:p>
           <a:p>
             <a:pPr>
               <a:spcAft>
                 <a:spcPts val="400"/>
               </a:spcAft>
-              <a:defRPr sz="1400">
+              <a:defRPr sz="1300">
                 <a:solidFill>
                   <a:srgbClr val="333333"/>
                 </a:solidFill>
                 <a:latin typeface="Calibri"/>
               </a:defRPr>
             </a:pPr>
+            <a:r>
+              <a:t>Vertex Cover mínimo en G = V menos el</a:t>
+            </a:r>
           </a:p>
           <a:p>
             <a:pPr>
               <a:spcAft>
                 <a:spcPts val="400"/>
               </a:spcAft>
-              <a:defRPr sz="1400">
+              <a:defRPr sz="1300">
                 <a:solidFill>
                   <a:srgbClr val="333333"/>
                 </a:solidFill>
@@ -11485,7 +11325,7 @@
               </a:defRPr>
             </a:pPr>
             <a:r>
-              <a:t>Esta dualidad es la base de varias familias</a:t>
+              <a:t>Independent Set máximo (mismo grafo G).</a:t>
             </a:r>
           </a:p>
           <a:p>
@@ -11493,7 +11333,36 @@
               <a:spcAft>
                 <a:spcPts val="400"/>
               </a:spcAft>
-              <a:defRPr sz="1400">
+              <a:defRPr sz="1300">
+                <a:solidFill>
+                  <a:srgbClr val="333333"/>
+                </a:solidFill>
+                <a:latin typeface="Calibri"/>
+              </a:defRPr>
+            </a:pPr>
+          </a:p>
+          <a:p>
+            <a:pPr>
+              <a:spcAft>
+                <a:spcPts val="400"/>
+              </a:spcAft>
+              <a:defRPr sz="1300">
+                <a:solidFill>
+                  <a:srgbClr val="333333"/>
+                </a:solidFill>
+                <a:latin typeface="Calibri"/>
+              </a:defRPr>
+            </a:pPr>
+            <a:r>
+              <a:t>Esta dualidad es la base de varias familias</a:t>
+            </a:r>
+          </a:p>
+          <a:p>
+            <a:pPr>
+              <a:spcAft>
+                <a:spcPts val="400"/>
+              </a:spcAft>
+              <a:defRPr sz="1300">
                 <a:solidFill>
                   <a:srgbClr val="333333"/>
                 </a:solidFill>
@@ -11713,7 +11582,7 @@
               </a:defRPr>
             </a:pPr>
             <a:r>
-              <a:t>4 / 22</a:t>
+              <a:t>4 / 21</a:t>
             </a:r>
           </a:p>
         </p:txBody>
@@ -12405,7 +12274,7 @@
               </a:defRPr>
             </a:pPr>
             <a:r>
-              <a:t>5 / 22</a:t>
+              <a:t>5 / 21</a:t>
             </a:r>
           </a:p>
         </p:txBody>
@@ -13354,7 +13223,7 @@
               </a:defRPr>
             </a:pPr>
             <a:r>
-              <a:t>7 / 22</a:t>
+              <a:t>7 / 21</a:t>
             </a:r>
           </a:p>
         </p:txBody>
@@ -14006,7 +13875,7 @@
               </a:defRPr>
             </a:pPr>
             <a:r>
-              <a:t>8 / 22</a:t>
+              <a:t>8 / 21</a:t>
             </a:r>
           </a:p>
         </p:txBody>
@@ -14772,7 +14641,7 @@
               </a:defRPr>
             </a:pPr>
             <a:r>
-              <a:t>9 / 22</a:t>
+              <a:t>9 / 21</a:t>
             </a:r>
           </a:p>
         </p:txBody>

--- a/presentacion/Presentacion_MCP.pptx
+++ b/presentacion/Presentacion_MCP.pptx
@@ -3575,7 +3575,7 @@
             <a:avLst/>
           </a:prstGeom>
           <a:solidFill>
-            <a:srgbClr val="DA291C"/>
+            <a:srgbClr val="00367C"/>
           </a:solidFill>
           <a:ln>
             <a:noFill/>
@@ -3618,7 +3618,7 @@
             <a:avLst/>
           </a:prstGeom>
           <a:solidFill>
-            <a:srgbClr val="00367C"/>
+            <a:srgbClr val="DA291C"/>
           </a:solidFill>
           <a:ln>
             <a:noFill/>

--- a/presentacion/Presentacion_MCP.pptx
+++ b/presentacion/Presentacion_MCP.pptx
@@ -6759,7 +6759,7 @@
               </a:defRPr>
             </a:pPr>
             <a:r>
-              <a:t>Ablación: efecto del mecanismo de reinicio</a:t>
+              <a:t>Experimento de ablación: efecto del mecanismo de reinicio</a:t>
             </a:r>
           </a:p>
         </p:txBody>
@@ -7365,7 +7365,7 @@
               </a:defRPr>
             </a:pPr>
             <a:r>
-              <a:t>Conclusión de la ablación</a:t>
+              <a:t>Conclusión del experimento de ablación</a:t>
             </a:r>
           </a:p>
         </p:txBody>

--- a/presentacion/Presentacion_MCP.pptx
+++ b/presentacion/Presentacion_MCP.pptx
@@ -3542,6 +3542,42 @@
           </a:p>
         </p:txBody>
       </p:sp>
+      <p:sp>
+        <p:nvSpPr>
+          <p:cNvPr id="14" name="TextBox 13"/>
+          <p:cNvSpPr txBox="1"/>
+          <p:nvPr/>
+        </p:nvSpPr>
+        <p:spPr>
+          <a:xfrm>
+            <a:off x="11094415" y="6400800"/>
+            <a:ext cx="914400" cy="320040"/>
+          </a:xfrm>
+          <a:prstGeom prst="rect">
+            <a:avLst/>
+          </a:prstGeom>
+          <a:noFill/>
+        </p:spPr>
+        <p:txBody>
+          <a:bodyPr wrap="none">
+            <a:spAutoFit/>
+          </a:bodyPr>
+          <a:lstStyle/>
+          <a:p>
+            <a:pPr algn="r">
+              <a:defRPr sz="1200">
+                <a:solidFill>
+                  <a:srgbClr val="333333"/>
+                </a:solidFill>
+                <a:latin typeface="Calibri"/>
+              </a:defRPr>
+            </a:pPr>
+            <a:r>
+              <a:t>1 / 21</a:t>
+            </a:r>
+          </a:p>
+        </p:txBody>
+      </p:sp>
     </p:spTree>
   </p:cSld>
   <p:clrMapOvr>
@@ -3750,6 +3786,42 @@
             </a:pPr>
             <a:r>
               <a:t>Búsqueda Tabú con reinicio por perturbación (estilo Búsqueda Local Iterada)</a:t>
+            </a:r>
+          </a:p>
+        </p:txBody>
+      </p:sp>
+      <p:sp>
+        <p:nvSpPr>
+          <p:cNvPr id="7" name="TextBox 6"/>
+          <p:cNvSpPr txBox="1"/>
+          <p:nvPr/>
+        </p:nvSpPr>
+        <p:spPr>
+          <a:xfrm>
+            <a:off x="11094415" y="6400800"/>
+            <a:ext cx="914400" cy="320040"/>
+          </a:xfrm>
+          <a:prstGeom prst="rect">
+            <a:avLst/>
+          </a:prstGeom>
+          <a:noFill/>
+        </p:spPr>
+        <p:txBody>
+          <a:bodyPr wrap="none">
+            <a:spAutoFit/>
+          </a:bodyPr>
+          <a:lstStyle/>
+          <a:p>
+            <a:pPr algn="r">
+              <a:defRPr sz="1200">
+                <a:solidFill>
+                  <a:srgbClr val="FFFFFF"/>
+                </a:solidFill>
+                <a:latin typeface="Calibri"/>
+              </a:defRPr>
+            </a:pPr>
+            <a:r>
+              <a:t>10 / 21</a:t>
             </a:r>
           </a:p>
         </p:txBody>
@@ -8101,6 +8173,42 @@
             </a:pPr>
             <a:r>
               <a:t>Método exacto (Informe 1) vs. metaheurística (Informe 2)</a:t>
+            </a:r>
+          </a:p>
+        </p:txBody>
+      </p:sp>
+      <p:sp>
+        <p:nvSpPr>
+          <p:cNvPr id="7" name="TextBox 6"/>
+          <p:cNvSpPr txBox="1"/>
+          <p:nvPr/>
+        </p:nvSpPr>
+        <p:spPr>
+          <a:xfrm>
+            <a:off x="11094415" y="6400800"/>
+            <a:ext cx="914400" cy="320040"/>
+          </a:xfrm>
+          <a:prstGeom prst="rect">
+            <a:avLst/>
+          </a:prstGeom>
+          <a:noFill/>
+        </p:spPr>
+        <p:txBody>
+          <a:bodyPr wrap="none">
+            <a:spAutoFit/>
+          </a:bodyPr>
+          <a:lstStyle/>
+          <a:p>
+            <a:pPr algn="r">
+              <a:defRPr sz="1200">
+                <a:solidFill>
+                  <a:srgbClr val="FFFFFF"/>
+                </a:solidFill>
+                <a:latin typeface="Calibri"/>
+              </a:defRPr>
+            </a:pPr>
+            <a:r>
+              <a:t>17 / 21</a:t>
             </a:r>
           </a:p>
         </p:txBody>
@@ -10667,6 +10775,42 @@
           </a:p>
         </p:txBody>
       </p:sp>
+      <p:sp>
+        <p:nvSpPr>
+          <p:cNvPr id="8" name="TextBox 7"/>
+          <p:cNvSpPr txBox="1"/>
+          <p:nvPr/>
+        </p:nvSpPr>
+        <p:spPr>
+          <a:xfrm>
+            <a:off x="11094415" y="6400800"/>
+            <a:ext cx="914400" cy="320040"/>
+          </a:xfrm>
+          <a:prstGeom prst="rect">
+            <a:avLst/>
+          </a:prstGeom>
+          <a:noFill/>
+        </p:spPr>
+        <p:txBody>
+          <a:bodyPr wrap="none">
+            <a:spAutoFit/>
+          </a:bodyPr>
+          <a:lstStyle/>
+          <a:p>
+            <a:pPr algn="r">
+              <a:defRPr sz="1200">
+                <a:solidFill>
+                  <a:srgbClr val="FFFFFF"/>
+                </a:solidFill>
+                <a:latin typeface="Calibri"/>
+              </a:defRPr>
+            </a:pPr>
+            <a:r>
+              <a:t>21 / 21</a:t>
+            </a:r>
+          </a:p>
+        </p:txBody>
+      </p:sp>
     </p:spTree>
   </p:cSld>
   <p:clrMapOvr>
@@ -13052,6 +13196,42 @@
           </a:p>
         </p:txBody>
       </p:sp>
+      <p:sp>
+        <p:nvSpPr>
+          <p:cNvPr id="7" name="TextBox 6"/>
+          <p:cNvSpPr txBox="1"/>
+          <p:nvPr/>
+        </p:nvSpPr>
+        <p:spPr>
+          <a:xfrm>
+            <a:off x="11094415" y="6400800"/>
+            <a:ext cx="914400" cy="320040"/>
+          </a:xfrm>
+          <a:prstGeom prst="rect">
+            <a:avLst/>
+          </a:prstGeom>
+          <a:noFill/>
+        </p:spPr>
+        <p:txBody>
+          <a:bodyPr wrap="none">
+            <a:spAutoFit/>
+          </a:bodyPr>
+          <a:lstStyle/>
+          <a:p>
+            <a:pPr algn="r">
+              <a:defRPr sz="1200">
+                <a:solidFill>
+                  <a:srgbClr val="FFFFFF"/>
+                </a:solidFill>
+                <a:latin typeface="Calibri"/>
+              </a:defRPr>
+            </a:pPr>
+            <a:r>
+              <a:t>6 / 21</a:t>
+            </a:r>
+          </a:p>
+        </p:txBody>
+      </p:sp>
     </p:spTree>
   </p:cSld>
   <p:clrMapOvr>
@@ -13647,7 +13827,7 @@
               </a:defRPr>
             </a:pPr>
             <a:r>
-              <a:t>Python + Pyomo (modelado algebraico) + HiGHS (solver MIP: Branch &amp; Bound</a:t>
+              <a:t>Python + Pyomo (modelado algebraico) + HiGHS (solver MIP — Mixed Integer</a:t>
             </a:r>
           </a:p>
           <a:p>
@@ -13663,7 +13843,7 @@
               </a:defRPr>
             </a:pPr>
             <a:r>
-              <a:t>con planos de corte y heurísticas de factibilidad internas).</a:t>
+              <a:t>Programming —: Branch &amp; Bound con planos de corte y heurísticas de factibilidad internas).</a:t>
             </a:r>
           </a:p>
         </p:txBody>
@@ -14405,7 +14585,7 @@
               </a:defRPr>
             </a:pPr>
             <a:r>
-              <a:t>factibilidad y ramificación adaptativa — técnicas ausentes en GLPK.</a:t>
+              <a:t>factibilidad y ramificación adaptativa — técnicas ausentes en GLPK (GNU Linear Programming Kit).</a:t>
             </a:r>
           </a:p>
         </p:txBody>
@@ -14677,7 +14857,7 @@
               </a:defRPr>
             </a:pPr>
             <a:r>
-              <a:t>Se reemplaza xᵢ ∈ {0,1} por xᵢ ∈ [0,1] y se resuelve el LP continuo.</a:t>
+              <a:t>Se reemplaza xᵢ ∈ {0,1} por xᵢ ∈ [0,1] y se resuelve el LP (Linear Programming) continuo.</a:t>
             </a:r>
           </a:p>
         </p:txBody>

--- a/presentacion/Presentacion_MCP.pptx
+++ b/presentacion/Presentacion_MCP.pptx
@@ -6474,7 +6474,7 @@
         <p:spPr>
           <a:xfrm>
             <a:off x="1005840" y="3749039"/>
-            <a:ext cx="10149840" cy="1554480"/>
+            <a:ext cx="10149840" cy="2286000"/>
           </a:xfrm>
           <a:prstGeom prst="rect">
             <a:avLst/>
@@ -6519,7 +6519,7 @@
         <p:spPr>
           <a:xfrm>
             <a:off x="1005840" y="3749039"/>
-            <a:ext cx="109728" cy="1554480"/>
+            <a:ext cx="109728" cy="2286000"/>
           </a:xfrm>
           <a:prstGeom prst="rect">
             <a:avLst/>
@@ -6598,7 +6598,7 @@
         <p:spPr>
           <a:xfrm>
             <a:off x="1280160" y="4434839"/>
-            <a:ext cx="9692640" cy="731520"/>
+            <a:ext cx="9692640" cy="1463040"/>
           </a:xfrm>
           <a:prstGeom prst="rect">
             <a:avLst/>
@@ -6656,6 +6656,38 @@
             </a:pPr>
             <a:r>
               <a:t>del orden de centésimas de segundo — prácticamente insensible a la dificultad de la instancia.</a:t>
+            </a:r>
+          </a:p>
+          <a:p>
+            <a:pPr>
+              <a:spcAft>
+                <a:spcPts val="400"/>
+              </a:spcAft>
+              <a:defRPr sz="1600">
+                <a:solidFill>
+                  <a:srgbClr val="333333"/>
+                </a:solidFill>
+                <a:latin typeface="Calibri"/>
+              </a:defRPr>
+            </a:pPr>
+            <a:r>
+              <a:t>Las corridas fallidas no se deben a pocas perturbaciones: completan 39 reinicios cada una,</a:t>
+            </a:r>
+          </a:p>
+          <a:p>
+            <a:pPr>
+              <a:spcAft>
+                <a:spcPts val="400"/>
+              </a:spcAft>
+              <a:defRPr sz="1600">
+                <a:solidFill>
+                  <a:srgbClr val="333333"/>
+                </a:solidFill>
+                <a:latin typeface="Calibri"/>
+              </a:defRPr>
+            </a:pPr>
+            <a:r>
+              <a:t>similar al rango de las exitosas (36-40) — indica una cuenca de atracción que resiste la diversificación.</a:t>
             </a:r>
           </a:p>
         </p:txBody>
@@ -10373,6 +10405,25 @@
               <a:t>•  El contraste confirma el compromiso teórico garantía vs. escalabilidad entre ambos paradigmas.</a:t>
             </a:r>
           </a:p>
+          <a:p>
+            <a:pPr>
+              <a:lnSpc>
+                <a:spcPct val="115000"/>
+              </a:lnSpc>
+              <a:spcAft>
+                <a:spcPts val="800"/>
+              </a:spcAft>
+              <a:defRPr sz="1600">
+                <a:solidFill>
+                  <a:srgbClr val="333333"/>
+                </a:solidFill>
+                <a:latin typeface="Calibri"/>
+              </a:defRPr>
+            </a:pPr>
+            <a:r>
+              <a:t>•  Esta velocidad sugiere aplicaciones reales sensibles al tiempo (ej. cribado molecular); validar a esa escala queda como trabajo futuro.</a:t>
+            </a:r>
+          </a:p>
         </p:txBody>
       </p:sp>
       <p:sp>
@@ -13827,7 +13878,7 @@
               </a:defRPr>
             </a:pPr>
             <a:r>
-              <a:t>Python + Pyomo (modelado algebraico) + HiGHS (solver MIP — Mixed Integer</a:t>
+              <a:t>Python + Pyomo (modelado algebraico) + HiGHS (solver MIP, Mixed Integer</a:t>
             </a:r>
           </a:p>
           <a:p>
@@ -13843,7 +13894,7 @@
               </a:defRPr>
             </a:pPr>
             <a:r>
-              <a:t>Programming —: Branch &amp; Bound con planos de corte y heurísticas de factibilidad internas).</a:t>
+              <a:t>Programming: Branch &amp; Bound con planos de corte y heurísticas de factibilidad internas).</a:t>
             </a:r>
           </a:p>
         </p:txBody>

--- a/presentacion/Presentacion_MCP.pptx
+++ b/presentacion/Presentacion_MCP.pptx
@@ -4321,8 +4321,8 @@
         </p:nvSpPr>
         <p:spPr>
           <a:xfrm>
-            <a:off x="640080" y="5486400"/>
-            <a:ext cx="10911535" cy="822960"/>
+            <a:off x="640080" y="5120640"/>
+            <a:ext cx="10911535" cy="1188720"/>
           </a:xfrm>
           <a:prstGeom prst="rect">
             <a:avLst/>
@@ -4366,8 +4366,8 @@
         </p:nvSpPr>
         <p:spPr>
           <a:xfrm>
-            <a:off x="640080" y="5486400"/>
-            <a:ext cx="109728" cy="822960"/>
+            <a:off x="640080" y="5120640"/>
+            <a:ext cx="109728" cy="1188720"/>
           </a:xfrm>
           <a:prstGeom prst="rect">
             <a:avLst/>
@@ -4409,7 +4409,7 @@
         </p:nvSpPr>
         <p:spPr>
           <a:xfrm>
-            <a:off x="914400" y="5623560"/>
+            <a:off x="914400" y="5257800"/>
             <a:ext cx="10545775" cy="411480"/>
           </a:xfrm>
           <a:prstGeom prst="rect">
@@ -4445,8 +4445,8 @@
         </p:nvSpPr>
         <p:spPr>
           <a:xfrm>
-            <a:off x="914400" y="6172200"/>
-            <a:ext cx="10454335" cy="0"/>
+            <a:off x="914400" y="5806440"/>
+            <a:ext cx="10454335" cy="365760"/>
           </a:xfrm>
           <a:prstGeom prst="rect">
             <a:avLst/>
@@ -4833,8 +4833,8 @@
         </p:nvSpPr>
         <p:spPr>
           <a:xfrm>
-            <a:off x="640080" y="5486400"/>
-            <a:ext cx="10911535" cy="822960"/>
+            <a:off x="640080" y="4480560"/>
+            <a:ext cx="10911535" cy="1371600"/>
           </a:xfrm>
           <a:prstGeom prst="rect">
             <a:avLst/>
@@ -4878,8 +4878,8 @@
         </p:nvSpPr>
         <p:spPr>
           <a:xfrm>
-            <a:off x="640080" y="5486400"/>
-            <a:ext cx="109728" cy="822960"/>
+            <a:off x="640080" y="4480560"/>
+            <a:ext cx="109728" cy="1371600"/>
           </a:xfrm>
           <a:prstGeom prst="rect">
             <a:avLst/>
@@ -4921,7 +4921,7 @@
         </p:nvSpPr>
         <p:spPr>
           <a:xfrm>
-            <a:off x="914400" y="5623560"/>
+            <a:off x="914400" y="4617720"/>
             <a:ext cx="10545775" cy="411480"/>
           </a:xfrm>
           <a:prstGeom prst="rect">
@@ -4957,8 +4957,8 @@
         </p:nvSpPr>
         <p:spPr>
           <a:xfrm>
-            <a:off x="914400" y="6172200"/>
-            <a:ext cx="10454335" cy="0"/>
+            <a:off x="914400" y="5166360"/>
+            <a:ext cx="10454335" cy="548640"/>
           </a:xfrm>
           <a:prstGeom prst="rect">
             <a:avLst/>
@@ -9094,7 +9094,7 @@
         <p:spPr>
           <a:xfrm>
             <a:off x="548640" y="3931920"/>
-            <a:ext cx="11064240" cy="1097280"/>
+            <a:ext cx="11064240" cy="1463040"/>
           </a:xfrm>
           <a:prstGeom prst="rect">
             <a:avLst/>
@@ -9139,7 +9139,7 @@
         <p:spPr>
           <a:xfrm>
             <a:off x="548640" y="3931920"/>
-            <a:ext cx="109728" cy="1097280"/>
+            <a:ext cx="109728" cy="1463040"/>
           </a:xfrm>
           <a:prstGeom prst="rect">
             <a:avLst/>
@@ -9218,7 +9218,7 @@
         <p:spPr>
           <a:xfrm>
             <a:off x="822960" y="4617720"/>
-            <a:ext cx="10607040" cy="274320"/>
+            <a:ext cx="10607040" cy="640080"/>
           </a:xfrm>
           <a:prstGeom prst="rect">
             <a:avLst/>
@@ -9492,8 +9492,8 @@
         </p:blipFill>
         <p:spPr>
           <a:xfrm>
-            <a:off x="3108960" y="1143000"/>
-            <a:ext cx="5467349" cy="3749039"/>
+            <a:off x="3694176" y="1143000"/>
+            <a:ext cx="4800600" cy="3291840"/>
           </a:xfrm>
           <a:prstGeom prst="rect">
             <a:avLst/>
@@ -9508,8 +9508,8 @@
         </p:nvSpPr>
         <p:spPr>
           <a:xfrm>
-            <a:off x="640080" y="4983480"/>
-            <a:ext cx="10911535" cy="1417320"/>
+            <a:off x="640080" y="4572000"/>
+            <a:ext cx="10911535" cy="1737360"/>
           </a:xfrm>
           <a:prstGeom prst="rect">
             <a:avLst/>
@@ -9553,8 +9553,8 @@
         </p:nvSpPr>
         <p:spPr>
           <a:xfrm>
-            <a:off x="640080" y="4983480"/>
-            <a:ext cx="109728" cy="1417320"/>
+            <a:off x="640080" y="4572000"/>
+            <a:ext cx="109728" cy="1737360"/>
           </a:xfrm>
           <a:prstGeom prst="rect">
             <a:avLst/>
@@ -9596,7 +9596,7 @@
         </p:nvSpPr>
         <p:spPr>
           <a:xfrm>
-            <a:off x="914400" y="5120640"/>
+            <a:off x="914400" y="4709160"/>
             <a:ext cx="10545775" cy="411480"/>
           </a:xfrm>
           <a:prstGeom prst="rect">
@@ -9632,8 +9632,8 @@
         </p:nvSpPr>
         <p:spPr>
           <a:xfrm>
-            <a:off x="914400" y="5669280"/>
-            <a:ext cx="10454335" cy="594360"/>
+            <a:off x="914400" y="5257800"/>
+            <a:ext cx="10454335" cy="914400"/>
           </a:xfrm>
           <a:prstGeom prst="rect">
             <a:avLst/>
@@ -12483,7 +12483,7 @@
         <p:spPr>
           <a:xfrm>
             <a:off x="457200" y="1280160"/>
-            <a:ext cx="11277295" cy="1463040"/>
+            <a:ext cx="11277295" cy="1554480"/>
           </a:xfrm>
           <a:prstGeom prst="rect">
             <a:avLst/>
@@ -12528,7 +12528,7 @@
         <p:spPr>
           <a:xfrm>
             <a:off x="457200" y="1280160"/>
-            <a:ext cx="109728" cy="1463040"/>
+            <a:ext cx="109728" cy="1554480"/>
           </a:xfrm>
           <a:prstGeom prst="rect">
             <a:avLst/>
@@ -12607,7 +12607,7 @@
         <p:spPr>
           <a:xfrm>
             <a:off x="731520" y="1965960"/>
-            <a:ext cx="10820095" cy="640080"/>
+            <a:ext cx="10820095" cy="731520"/>
           </a:xfrm>
           <a:prstGeom prst="rect">
             <a:avLst/>
@@ -12812,8 +12812,8 @@
         </p:nvSpPr>
         <p:spPr>
           <a:xfrm>
-            <a:off x="457200" y="5212080"/>
-            <a:ext cx="11277295" cy="1188720"/>
+            <a:off x="457200" y="4846320"/>
+            <a:ext cx="11277295" cy="1554480"/>
           </a:xfrm>
           <a:prstGeom prst="rect">
             <a:avLst/>
@@ -12857,8 +12857,8 @@
         </p:nvSpPr>
         <p:spPr>
           <a:xfrm>
-            <a:off x="457200" y="5212080"/>
-            <a:ext cx="109728" cy="1188720"/>
+            <a:off x="457200" y="4846320"/>
+            <a:ext cx="109728" cy="1554480"/>
           </a:xfrm>
           <a:prstGeom prst="rect">
             <a:avLst/>
@@ -12900,7 +12900,7 @@
         </p:nvSpPr>
         <p:spPr>
           <a:xfrm>
-            <a:off x="731520" y="5349240"/>
+            <a:off x="731520" y="4983480"/>
             <a:ext cx="10911535" cy="411480"/>
           </a:xfrm>
           <a:prstGeom prst="rect">
@@ -12936,8 +12936,8 @@
         </p:nvSpPr>
         <p:spPr>
           <a:xfrm>
-            <a:off x="731520" y="5897880"/>
-            <a:ext cx="10820095" cy="365760"/>
+            <a:off x="731520" y="5532120"/>
+            <a:ext cx="10820095" cy="731520"/>
           </a:xfrm>
           <a:prstGeom prst="rect">
             <a:avLst/>
@@ -13729,7 +13729,7 @@
         <p:spPr>
           <a:xfrm>
             <a:off x="640080" y="5120640"/>
-            <a:ext cx="10911535" cy="1188720"/>
+            <a:ext cx="10911535" cy="1325880"/>
           </a:xfrm>
           <a:prstGeom prst="rect">
             <a:avLst/>
@@ -13774,7 +13774,7 @@
         <p:spPr>
           <a:xfrm>
             <a:off x="640080" y="5120640"/>
-            <a:ext cx="109728" cy="1188720"/>
+            <a:ext cx="109728" cy="1325880"/>
           </a:xfrm>
           <a:prstGeom prst="rect">
             <a:avLst/>
@@ -13853,7 +13853,7 @@
         <p:spPr>
           <a:xfrm>
             <a:off x="914400" y="5806440"/>
-            <a:ext cx="10454335" cy="365760"/>
+            <a:ext cx="10454335" cy="502920"/>
           </a:xfrm>
           <a:prstGeom prst="rect">
             <a:avLst/>
@@ -14454,8 +14454,8 @@
         </p:nvSpPr>
         <p:spPr>
           <a:xfrm>
-            <a:off x="822960" y="3383280"/>
-            <a:ext cx="10515600" cy="1463040"/>
+            <a:off x="822960" y="3291840"/>
+            <a:ext cx="10515600" cy="2011680"/>
           </a:xfrm>
           <a:prstGeom prst="rect">
             <a:avLst/>
@@ -14499,8 +14499,8 @@
         </p:nvSpPr>
         <p:spPr>
           <a:xfrm>
-            <a:off x="822960" y="3383280"/>
-            <a:ext cx="109728" cy="1463040"/>
+            <a:off x="822960" y="3291840"/>
+            <a:ext cx="109728" cy="2011680"/>
           </a:xfrm>
           <a:prstGeom prst="rect">
             <a:avLst/>
@@ -14542,7 +14542,7 @@
         </p:nvSpPr>
         <p:spPr>
           <a:xfrm>
-            <a:off x="1097280" y="3520440"/>
+            <a:off x="1097280" y="3429000"/>
             <a:ext cx="10149840" cy="411480"/>
           </a:xfrm>
           <a:prstGeom prst="rect">
@@ -14578,8 +14578,8 @@
         </p:nvSpPr>
         <p:spPr>
           <a:xfrm>
-            <a:off x="1097280" y="4069080"/>
-            <a:ext cx="10058400" cy="640080"/>
+            <a:off x="1097280" y="3977640"/>
+            <a:ext cx="10058400" cy="1188720"/>
           </a:xfrm>
           <a:prstGeom prst="rect">
             <a:avLst/>
@@ -14596,7 +14596,7 @@
               <a:spcAft>
                 <a:spcPts val="400"/>
               </a:spcAft>
-              <a:defRPr sz="1500">
+              <a:defRPr sz="1700">
                 <a:solidFill>
                   <a:srgbClr val="333333"/>
                 </a:solidFill>
@@ -14612,7 +14612,7 @@
               <a:spcAft>
                 <a:spcPts val="400"/>
               </a:spcAft>
-              <a:defRPr sz="1500">
+              <a:defRPr sz="1700">
                 <a:solidFill>
                   <a:srgbClr val="333333"/>
                 </a:solidFill>
@@ -14628,7 +14628,7 @@
               <a:spcAft>
                 <a:spcPts val="400"/>
               </a:spcAft>
-              <a:defRPr sz="1500">
+              <a:defRPr sz="1700">
                 <a:solidFill>
                   <a:srgbClr val="333333"/>
                 </a:solidFill>
@@ -14641,33 +14641,9 @@
           </a:p>
         </p:txBody>
       </p:sp>
-      <p:pic>
-        <p:nvPicPr>
-          <p:cNvPr id="11" name="Picture 10" descr="resultados_keller4_pyomo.png"/>
-          <p:cNvPicPr>
-            <a:picLocks noChangeAspect="1"/>
-          </p:cNvPicPr>
-          <p:nvPr/>
-        </p:nvPicPr>
-        <p:blipFill>
-          <a:blip r:embed="rId2"/>
-          <a:stretch>
-            <a:fillRect/>
-          </a:stretch>
-        </p:blipFill>
-        <p:spPr>
-          <a:xfrm>
-            <a:off x="4434840" y="4892040"/>
-            <a:ext cx="3352662" cy="1417320"/>
-          </a:xfrm>
-          <a:prstGeom prst="rect">
-            <a:avLst/>
-          </a:prstGeom>
-        </p:spPr>
-      </p:pic>
-      <p:sp>
-        <p:nvSpPr>
-          <p:cNvPr id="12" name="TextBox 11"/>
+      <p:sp>
+        <p:nvSpPr>
+          <p:cNvPr id="11" name="TextBox 10"/>
           <p:cNvSpPr txBox="1"/>
           <p:nvPr/>
         </p:nvSpPr>
